--- a/public/manual-1page.pptx
+++ b/public/manual-1page.pptx
@@ -22,6 +22,7 @@
     <p:sldId id="270" r:id="rId21"/>
     <p:sldId id="271" r:id="rId22"/>
     <p:sldId id="272" r:id="rId23"/>
+    <p:sldId id="273" r:id="rId24"/>
   </p:sldIdLst>
   <p:sldSz cx="7560000" cy="10692000" type="screen4x3"/>
   <p:notesSz cx="6858000" cy="9144000"/>
@@ -4017,6 +4018,123 @@
           </a:p>
         </p:txBody>
       </p:sp>
+      <p:pic>
+        <p:nvPicPr>
+          <p:cNvPr id="8" name="Picture 7" descr="image.jpg"/>
+          <p:cNvPicPr>
+            <a:picLocks noChangeAspect="1"/>
+          </p:cNvPicPr>
+          <p:nvPr/>
+        </p:nvPicPr>
+        <p:blipFill>
+          <a:blip r:embed="rId3"/>
+          <a:srcRect t="11842" b="11842"/>
+          <a:stretch>
+            <a:fillRect/>
+          </a:stretch>
+        </p:blipFill>
+        <p:spPr>
+          <a:xfrm>
+            <a:off x="576000" y="6443772"/>
+            <a:ext cx="6408000" cy="3672227"/>
+          </a:xfrm>
+          <a:prstGeom prst="rect">
+            <a:avLst/>
+          </a:prstGeom>
+        </p:spPr>
+      </p:pic>
+      <p:sp>
+        <p:nvSpPr>
+          <p:cNvPr id="9" name="Rectangle 8"/>
+          <p:cNvSpPr/>
+          <p:nvPr/>
+        </p:nvSpPr>
+        <p:spPr>
+          <a:xfrm>
+            <a:off x="576000" y="9792000"/>
+            <a:ext cx="6408000" cy="324000"/>
+          </a:xfrm>
+          <a:prstGeom prst="rect">
+            <a:avLst/>
+          </a:prstGeom>
+          <a:solidFill>
+            <a:srgbClr val="142744">
+              <a:alpha val="48000"/>
+            </a:srgbClr>
+          </a:solidFill>
+          <a:ln>
+            <a:noFill/>
+          </a:ln>
+          <a:effectLst/>
+        </p:spPr>
+        <p:style>
+          <a:lnRef idx="1">
+            <a:schemeClr val="accent1"/>
+          </a:lnRef>
+          <a:fillRef idx="3">
+            <a:schemeClr val="accent1"/>
+          </a:fillRef>
+          <a:effectRef idx="2">
+            <a:schemeClr val="accent1"/>
+          </a:effectRef>
+          <a:fontRef idx="minor">
+            <a:schemeClr val="lt1"/>
+          </a:fontRef>
+        </p:style>
+        <p:txBody>
+          <a:bodyPr rtlCol="0" anchor="ctr"/>
+          <a:lstStyle/>
+          <a:p>
+            <a:pPr algn="ctr"/>
+          </a:p>
+        </p:txBody>
+      </p:sp>
+      <p:sp>
+        <p:nvSpPr>
+          <p:cNvPr id="10" name="TextBox 9"/>
+          <p:cNvSpPr txBox="1"/>
+          <p:nvPr/>
+        </p:nvSpPr>
+        <p:spPr>
+          <a:xfrm>
+            <a:off x="684000" y="9792000"/>
+            <a:ext cx="6192000" cy="324000"/>
+          </a:xfrm>
+          <a:prstGeom prst="rect">
+            <a:avLst/>
+          </a:prstGeom>
+          <a:noFill/>
+        </p:spPr>
+        <p:txBody>
+          <a:bodyPr wrap="square" lIns="72000" rIns="72000" tIns="36000" bIns="36000" anchor="ctr">
+            <a:spAutoFit/>
+          </a:bodyPr>
+          <a:lstStyle/>
+          <a:p>
+            <a:pPr>
+              <a:lnSpc>
+                <a:spcPct val="116000"/>
+              </a:lnSpc>
+              <a:spcBef>
+                <a:spcPts val="0"/>
+              </a:spcBef>
+              <a:spcAft>
+                <a:spcPts val="0"/>
+              </a:spcAft>
+            </a:pPr>
+            <a:r>
+              <a:rPr sz="850" b="0" i="0">
+                <a:solidFill>
+                  <a:srgbClr val="FFFFFF"/>
+                </a:solidFill>
+                <a:latin typeface="Yu Gothic"/>
+                <a:ea typeface="Yu Gothic"/>
+              </a:rPr>
+              <a:t>相模原ダルク デイケアセンター</a:t>
+            </a:r>
+          </a:p>
+        </p:txBody>
+      </p:sp>
     </p:spTree>
   </p:cSld>
   <p:clrMapOvr>
@@ -4723,6 +4841,123 @@
           </a:p>
         </p:txBody>
       </p:sp>
+      <p:pic>
+        <p:nvPicPr>
+          <p:cNvPr id="8" name="Picture 7" descr="image.jpg"/>
+          <p:cNvPicPr>
+            <a:picLocks noChangeAspect="1"/>
+          </p:cNvPicPr>
+          <p:nvPr/>
+        </p:nvPicPr>
+        <p:blipFill>
+          <a:blip r:embed="rId3"/>
+          <a:srcRect t="33202" b="33202"/>
+          <a:stretch>
+            <a:fillRect/>
+          </a:stretch>
+        </p:blipFill>
+        <p:spPr>
+          <a:xfrm>
+            <a:off x="576000" y="8504959"/>
+            <a:ext cx="6408000" cy="1611040"/>
+          </a:xfrm>
+          <a:prstGeom prst="rect">
+            <a:avLst/>
+          </a:prstGeom>
+        </p:spPr>
+      </p:pic>
+      <p:sp>
+        <p:nvSpPr>
+          <p:cNvPr id="9" name="Rectangle 8"/>
+          <p:cNvSpPr/>
+          <p:nvPr/>
+        </p:nvSpPr>
+        <p:spPr>
+          <a:xfrm>
+            <a:off x="576000" y="9792000"/>
+            <a:ext cx="6408000" cy="324000"/>
+          </a:xfrm>
+          <a:prstGeom prst="rect">
+            <a:avLst/>
+          </a:prstGeom>
+          <a:solidFill>
+            <a:srgbClr val="142744">
+              <a:alpha val="48000"/>
+            </a:srgbClr>
+          </a:solidFill>
+          <a:ln>
+            <a:noFill/>
+          </a:ln>
+          <a:effectLst/>
+        </p:spPr>
+        <p:style>
+          <a:lnRef idx="1">
+            <a:schemeClr val="accent1"/>
+          </a:lnRef>
+          <a:fillRef idx="3">
+            <a:schemeClr val="accent1"/>
+          </a:fillRef>
+          <a:effectRef idx="2">
+            <a:schemeClr val="accent1"/>
+          </a:effectRef>
+          <a:fontRef idx="minor">
+            <a:schemeClr val="lt1"/>
+          </a:fontRef>
+        </p:style>
+        <p:txBody>
+          <a:bodyPr rtlCol="0" anchor="ctr"/>
+          <a:lstStyle/>
+          <a:p>
+            <a:pPr algn="ctr"/>
+          </a:p>
+        </p:txBody>
+      </p:sp>
+      <p:sp>
+        <p:nvSpPr>
+          <p:cNvPr id="10" name="TextBox 9"/>
+          <p:cNvSpPr txBox="1"/>
+          <p:nvPr/>
+        </p:nvSpPr>
+        <p:spPr>
+          <a:xfrm>
+            <a:off x="684000" y="9792000"/>
+            <a:ext cx="6192000" cy="324000"/>
+          </a:xfrm>
+          <a:prstGeom prst="rect">
+            <a:avLst/>
+          </a:prstGeom>
+          <a:noFill/>
+        </p:spPr>
+        <p:txBody>
+          <a:bodyPr wrap="square" lIns="72000" rIns="72000" tIns="36000" bIns="36000" anchor="ctr">
+            <a:spAutoFit/>
+          </a:bodyPr>
+          <a:lstStyle/>
+          <a:p>
+            <a:pPr>
+              <a:lnSpc>
+                <a:spcPct val="116000"/>
+              </a:lnSpc>
+              <a:spcBef>
+                <a:spcPts val="0"/>
+              </a:spcBef>
+              <a:spcAft>
+                <a:spcPts val="0"/>
+              </a:spcAft>
+            </a:pPr>
+            <a:r>
+              <a:rPr sz="850" b="0" i="0">
+                <a:solidFill>
+                  <a:srgbClr val="FFFFFF"/>
+                </a:solidFill>
+                <a:latin typeface="Yu Gothic"/>
+                <a:ea typeface="Yu Gothic"/>
+              </a:rPr>
+              <a:t>相模原ダルク デイケアセンター（ダルクビル）</a:t>
+            </a:r>
+          </a:p>
+        </p:txBody>
+      </p:sp>
     </p:spTree>
   </p:cSld>
   <p:clrMapOvr>
@@ -5636,11 +5871,11 @@
                 <a:spcPts val="0"/>
               </a:spcBef>
               <a:spcAft>
-                <a:spcPts val="280"/>
-              </a:spcAft>
-            </a:pPr>
-            <a:r>
-              <a:rPr sz="616" b="1" i="0">
+                <a:spcPts val="480"/>
+              </a:spcAft>
+            </a:pPr>
+            <a:r>
+              <a:rPr sz="1055" b="1" i="0">
                 <a:solidFill>
                   <a:srgbClr val="1B3358"/>
                 </a:solidFill>
@@ -5656,14 +5891,14 @@
                 <a:spcPct val="116000"/>
               </a:lnSpc>
               <a:spcBef>
-                <a:spcPts val="168"/>
-              </a:spcBef>
-              <a:spcAft>
-                <a:spcPts val="56"/>
-              </a:spcAft>
-            </a:pPr>
-            <a:r>
-              <a:rPr sz="588" b="1" i="0">
+                <a:spcPts val="288"/>
+              </a:spcBef>
+              <a:spcAft>
+                <a:spcPts val="96"/>
+              </a:spcAft>
+            </a:pPr>
+            <a:r>
+              <a:rPr sz="1008" b="1" i="0">
                 <a:solidFill>
                   <a:srgbClr val="1B3358"/>
                 </a:solidFill>
@@ -5682,11 +5917,11 @@
                 <a:spcPts val="0"/>
               </a:spcBef>
               <a:spcAft>
-                <a:spcPts val="168"/>
-              </a:spcAft>
-            </a:pPr>
-            <a:r>
-              <a:rPr sz="560" b="0" i="0">
+                <a:spcPts val="288"/>
+              </a:spcAft>
+            </a:pPr>
+            <a:r>
+              <a:rPr sz="960" b="0" i="0">
                 <a:solidFill>
                   <a:srgbClr val="242C3A"/>
                 </a:solidFill>
@@ -5702,14 +5937,14 @@
                 <a:spcPct val="116000"/>
               </a:lnSpc>
               <a:spcBef>
-                <a:spcPts val="168"/>
-              </a:spcBef>
-              <a:spcAft>
-                <a:spcPts val="56"/>
-              </a:spcAft>
-            </a:pPr>
-            <a:r>
-              <a:rPr sz="588" b="1" i="0">
+                <a:spcPts val="288"/>
+              </a:spcBef>
+              <a:spcAft>
+                <a:spcPts val="96"/>
+              </a:spcAft>
+            </a:pPr>
+            <a:r>
+              <a:rPr sz="1008" b="1" i="0">
                 <a:solidFill>
                   <a:srgbClr val="1B3358"/>
                 </a:solidFill>
@@ -5728,11 +5963,11 @@
                 <a:spcPts val="0"/>
               </a:spcBef>
               <a:spcAft>
-                <a:spcPts val="168"/>
-              </a:spcAft>
-            </a:pPr>
-            <a:r>
-              <a:rPr sz="560" b="0" i="0">
+                <a:spcPts val="288"/>
+              </a:spcAft>
+            </a:pPr>
+            <a:r>
+              <a:rPr sz="960" b="0" i="0">
                 <a:solidFill>
                   <a:srgbClr val="242C3A"/>
                 </a:solidFill>
@@ -5748,14 +5983,14 @@
                 <a:spcPct val="116000"/>
               </a:lnSpc>
               <a:spcBef>
-                <a:spcPts val="168"/>
-              </a:spcBef>
-              <a:spcAft>
-                <a:spcPts val="56"/>
-              </a:spcAft>
-            </a:pPr>
-            <a:r>
-              <a:rPr sz="588" b="1" i="0">
+                <a:spcPts val="288"/>
+              </a:spcBef>
+              <a:spcAft>
+                <a:spcPts val="96"/>
+              </a:spcAft>
+            </a:pPr>
+            <a:r>
+              <a:rPr sz="1008" b="1" i="0">
                 <a:solidFill>
                   <a:srgbClr val="1B3358"/>
                 </a:solidFill>
@@ -5774,11 +6009,11 @@
                 <a:spcPts val="0"/>
               </a:spcBef>
               <a:spcAft>
-                <a:spcPts val="168"/>
-              </a:spcAft>
-            </a:pPr>
-            <a:r>
-              <a:rPr sz="560" b="0" i="0">
+                <a:spcPts val="288"/>
+              </a:spcAft>
+            </a:pPr>
+            <a:r>
+              <a:rPr sz="960" b="0" i="0">
                 <a:solidFill>
                   <a:srgbClr val="242C3A"/>
                 </a:solidFill>
@@ -5794,14 +6029,14 @@
                 <a:spcPct val="116000"/>
               </a:lnSpc>
               <a:spcBef>
-                <a:spcPts val="168"/>
-              </a:spcBef>
-              <a:spcAft>
-                <a:spcPts val="56"/>
-              </a:spcAft>
-            </a:pPr>
-            <a:r>
-              <a:rPr sz="588" b="1" i="0">
+                <a:spcPts val="288"/>
+              </a:spcBef>
+              <a:spcAft>
+                <a:spcPts val="96"/>
+              </a:spcAft>
+            </a:pPr>
+            <a:r>
+              <a:rPr sz="1008" b="1" i="0">
                 <a:solidFill>
                   <a:srgbClr val="1B3358"/>
                 </a:solidFill>
@@ -5820,11 +6055,11 @@
                 <a:spcPts val="0"/>
               </a:spcBef>
               <a:spcAft>
-                <a:spcPts val="168"/>
-              </a:spcAft>
-            </a:pPr>
-            <a:r>
-              <a:rPr sz="560" b="0" i="0">
+                <a:spcPts val="288"/>
+              </a:spcAft>
+            </a:pPr>
+            <a:r>
+              <a:rPr sz="960" b="0" i="0">
                 <a:solidFill>
                   <a:srgbClr val="242C3A"/>
                 </a:solidFill>
@@ -5840,14 +6075,14 @@
                 <a:spcPct val="116000"/>
               </a:lnSpc>
               <a:spcBef>
-                <a:spcPts val="168"/>
-              </a:spcBef>
-              <a:spcAft>
-                <a:spcPts val="56"/>
-              </a:spcAft>
-            </a:pPr>
-            <a:r>
-              <a:rPr sz="588" b="1" i="0">
+                <a:spcPts val="288"/>
+              </a:spcBef>
+              <a:spcAft>
+                <a:spcPts val="96"/>
+              </a:spcAft>
+            </a:pPr>
+            <a:r>
+              <a:rPr sz="1008" b="1" i="0">
                 <a:solidFill>
                   <a:srgbClr val="1B3358"/>
                 </a:solidFill>
@@ -5866,11 +6101,11 @@
                 <a:spcPts val="0"/>
               </a:spcBef>
               <a:spcAft>
-                <a:spcPts val="168"/>
-              </a:spcAft>
-            </a:pPr>
-            <a:r>
-              <a:rPr sz="560" b="0" i="0">
+                <a:spcPts val="288"/>
+              </a:spcAft>
+            </a:pPr>
+            <a:r>
+              <a:rPr sz="960" b="0" i="0">
                 <a:solidFill>
                   <a:srgbClr val="242C3A"/>
                 </a:solidFill>
@@ -5886,14 +6121,14 @@
                 <a:spcPct val="116000"/>
               </a:lnSpc>
               <a:spcBef>
-                <a:spcPts val="168"/>
-              </a:spcBef>
-              <a:spcAft>
-                <a:spcPts val="56"/>
-              </a:spcAft>
-            </a:pPr>
-            <a:r>
-              <a:rPr sz="588" b="1" i="0">
+                <a:spcPts val="288"/>
+              </a:spcBef>
+              <a:spcAft>
+                <a:spcPts val="96"/>
+              </a:spcAft>
+            </a:pPr>
+            <a:r>
+              <a:rPr sz="1008" b="1" i="0">
                 <a:solidFill>
                   <a:srgbClr val="1B3358"/>
                 </a:solidFill>
@@ -5912,11 +6147,11 @@
                 <a:spcPts val="0"/>
               </a:spcBef>
               <a:spcAft>
-                <a:spcPts val="168"/>
-              </a:spcAft>
-            </a:pPr>
-            <a:r>
-              <a:rPr sz="560" b="0" i="0">
+                <a:spcPts val="288"/>
+              </a:spcAft>
+            </a:pPr>
+            <a:r>
+              <a:rPr sz="960" b="0" i="0">
                 <a:solidFill>
                   <a:srgbClr val="242C3A"/>
                 </a:solidFill>
@@ -5932,14 +6167,14 @@
                 <a:spcPct val="116000"/>
               </a:lnSpc>
               <a:spcBef>
-                <a:spcPts val="168"/>
-              </a:spcBef>
-              <a:spcAft>
-                <a:spcPts val="56"/>
-              </a:spcAft>
-            </a:pPr>
-            <a:r>
-              <a:rPr sz="588" b="1" i="0">
+                <a:spcPts val="288"/>
+              </a:spcBef>
+              <a:spcAft>
+                <a:spcPts val="96"/>
+              </a:spcAft>
+            </a:pPr>
+            <a:r>
+              <a:rPr sz="1008" b="1" i="0">
                 <a:solidFill>
                   <a:srgbClr val="1B3358"/>
                 </a:solidFill>
@@ -5958,11 +6193,11 @@
                 <a:spcPts val="0"/>
               </a:spcBef>
               <a:spcAft>
-                <a:spcPts val="168"/>
-              </a:spcAft>
-            </a:pPr>
-            <a:r>
-              <a:rPr sz="560" b="0" i="0">
+                <a:spcPts val="288"/>
+              </a:spcAft>
+            </a:pPr>
+            <a:r>
+              <a:rPr sz="960" b="0" i="0">
                 <a:solidFill>
                   <a:srgbClr val="242C3A"/>
                 </a:solidFill>
@@ -5978,14 +6213,14 @@
                 <a:spcPct val="116000"/>
               </a:lnSpc>
               <a:spcBef>
-                <a:spcPts val="168"/>
-              </a:spcBef>
-              <a:spcAft>
-                <a:spcPts val="56"/>
-              </a:spcAft>
-            </a:pPr>
-            <a:r>
-              <a:rPr sz="588" b="1" i="0">
+                <a:spcPts val="288"/>
+              </a:spcBef>
+              <a:spcAft>
+                <a:spcPts val="96"/>
+              </a:spcAft>
+            </a:pPr>
+            <a:r>
+              <a:rPr sz="1008" b="1" i="0">
                 <a:solidFill>
                   <a:srgbClr val="1B3358"/>
                 </a:solidFill>
@@ -6004,11 +6239,11 @@
                 <a:spcPts val="0"/>
               </a:spcBef>
               <a:spcAft>
-                <a:spcPts val="168"/>
-              </a:spcAft>
-            </a:pPr>
-            <a:r>
-              <a:rPr sz="560" b="0" i="0">
+                <a:spcPts val="288"/>
+              </a:spcAft>
+            </a:pPr>
+            <a:r>
+              <a:rPr sz="960" b="0" i="0">
                 <a:solidFill>
                   <a:srgbClr val="242C3A"/>
                 </a:solidFill>
@@ -6024,14 +6259,14 @@
                 <a:spcPct val="116000"/>
               </a:lnSpc>
               <a:spcBef>
-                <a:spcPts val="168"/>
-              </a:spcBef>
-              <a:spcAft>
-                <a:spcPts val="56"/>
-              </a:spcAft>
-            </a:pPr>
-            <a:r>
-              <a:rPr sz="588" b="1" i="0">
+                <a:spcPts val="288"/>
+              </a:spcBef>
+              <a:spcAft>
+                <a:spcPts val="96"/>
+              </a:spcAft>
+            </a:pPr>
+            <a:r>
+              <a:rPr sz="1008" b="1" i="0">
                 <a:solidFill>
                   <a:srgbClr val="1B3358"/>
                 </a:solidFill>
@@ -6050,11 +6285,11 @@
                 <a:spcPts val="0"/>
               </a:spcBef>
               <a:spcAft>
-                <a:spcPts val="168"/>
-              </a:spcAft>
-            </a:pPr>
-            <a:r>
-              <a:rPr sz="560" b="0" i="0">
+                <a:spcPts val="288"/>
+              </a:spcAft>
+            </a:pPr>
+            <a:r>
+              <a:rPr sz="960" b="0" i="0">
                 <a:solidFill>
                   <a:srgbClr val="242C3A"/>
                 </a:solidFill>
@@ -6070,14 +6305,14 @@
                 <a:spcPct val="116000"/>
               </a:lnSpc>
               <a:spcBef>
-                <a:spcPts val="168"/>
-              </a:spcBef>
-              <a:spcAft>
-                <a:spcPts val="56"/>
-              </a:spcAft>
-            </a:pPr>
-            <a:r>
-              <a:rPr sz="588" b="1" i="0">
+                <a:spcPts val="288"/>
+              </a:spcBef>
+              <a:spcAft>
+                <a:spcPts val="96"/>
+              </a:spcAft>
+            </a:pPr>
+            <a:r>
+              <a:rPr sz="1008" b="1" i="0">
                 <a:solidFill>
                   <a:srgbClr val="1B3358"/>
                 </a:solidFill>
@@ -6096,11 +6331,11 @@
                 <a:spcPts val="0"/>
               </a:spcBef>
               <a:spcAft>
-                <a:spcPts val="168"/>
-              </a:spcAft>
-            </a:pPr>
-            <a:r>
-              <a:rPr sz="560" b="0" i="0">
+                <a:spcPts val="288"/>
+              </a:spcAft>
+            </a:pPr>
+            <a:r>
+              <a:rPr sz="960" b="0" i="0">
                 <a:solidFill>
                   <a:srgbClr val="242C3A"/>
                 </a:solidFill>
@@ -6116,14 +6351,14 @@
                 <a:spcPct val="116000"/>
               </a:lnSpc>
               <a:spcBef>
-                <a:spcPts val="168"/>
-              </a:spcBef>
-              <a:spcAft>
-                <a:spcPts val="56"/>
-              </a:spcAft>
-            </a:pPr>
-            <a:r>
-              <a:rPr sz="588" b="1" i="0">
+                <a:spcPts val="288"/>
+              </a:spcBef>
+              <a:spcAft>
+                <a:spcPts val="96"/>
+              </a:spcAft>
+            </a:pPr>
+            <a:r>
+              <a:rPr sz="1008" b="1" i="0">
                 <a:solidFill>
                   <a:srgbClr val="1B3358"/>
                 </a:solidFill>
@@ -6142,11 +6377,11 @@
                 <a:spcPts val="0"/>
               </a:spcBef>
               <a:spcAft>
-                <a:spcPts val="168"/>
-              </a:spcAft>
-            </a:pPr>
-            <a:r>
-              <a:rPr sz="560" b="0" i="0">
+                <a:spcPts val="288"/>
+              </a:spcAft>
+            </a:pPr>
+            <a:r>
+              <a:rPr sz="960" b="0" i="0">
                 <a:solidFill>
                   <a:srgbClr val="242C3A"/>
                 </a:solidFill>
@@ -6162,14 +6397,14 @@
                 <a:spcPct val="116000"/>
               </a:lnSpc>
               <a:spcBef>
-                <a:spcPts val="168"/>
-              </a:spcBef>
-              <a:spcAft>
-                <a:spcPts val="56"/>
-              </a:spcAft>
-            </a:pPr>
-            <a:r>
-              <a:rPr sz="588" b="1" i="0">
+                <a:spcPts val="288"/>
+              </a:spcBef>
+              <a:spcAft>
+                <a:spcPts val="96"/>
+              </a:spcAft>
+            </a:pPr>
+            <a:r>
+              <a:rPr sz="1008" b="1" i="0">
                 <a:solidFill>
                   <a:srgbClr val="1B3358"/>
                 </a:solidFill>
@@ -6188,11 +6423,11 @@
                 <a:spcPts val="0"/>
               </a:spcBef>
               <a:spcAft>
-                <a:spcPts val="168"/>
-              </a:spcAft>
-            </a:pPr>
-            <a:r>
-              <a:rPr sz="560" b="0" i="0">
+                <a:spcPts val="288"/>
+              </a:spcAft>
+            </a:pPr>
+            <a:r>
+              <a:rPr sz="960" b="0" i="0">
                 <a:solidFill>
                   <a:srgbClr val="242C3A"/>
                 </a:solidFill>
@@ -6200,558 +6435,6 @@
                 <a:ea typeface="Yu Gothic"/>
               </a:rPr>
               <a:t>A 本人がすぐに受け入れないことは珍しくありません。無理に押し込もうとするより、家族が先に学び、関わり方を変えていくことが、結果的に本人の一歩につながることがあります。まずはご家族がダルクとつながってください。</a:t>
-            </a:r>
-          </a:p>
-          <a:p>
-            <a:pPr>
-              <a:lnSpc>
-                <a:spcPct val="116000"/>
-              </a:lnSpc>
-              <a:spcBef>
-                <a:spcPts val="168"/>
-              </a:spcBef>
-              <a:spcAft>
-                <a:spcPts val="56"/>
-              </a:spcAft>
-            </a:pPr>
-            <a:r>
-              <a:rPr sz="588" b="1" i="0">
-                <a:solidFill>
-                  <a:srgbClr val="1B3358"/>
-                </a:solidFill>
-                <a:latin typeface="Yu Gothic"/>
-                <a:ea typeface="Yu Gothic"/>
-              </a:rPr>
-              <a:t>Q 一度スリップ（再使用）したら、もうだめですか?</a:t>
-            </a:r>
-          </a:p>
-          <a:p>
-            <a:pPr>
-              <a:lnSpc>
-                <a:spcPct val="116000"/>
-              </a:lnSpc>
-              <a:spcBef>
-                <a:spcPts val="0"/>
-              </a:spcBef>
-              <a:spcAft>
-                <a:spcPts val="168"/>
-              </a:spcAft>
-            </a:pPr>
-            <a:r>
-              <a:rPr sz="560" b="0" i="0">
-                <a:solidFill>
-                  <a:srgbClr val="242C3A"/>
-                </a:solidFill>
-                <a:latin typeface="Yu Gothic"/>
-                <a:ea typeface="Yu Gothic"/>
-              </a:rPr>
-              <a:t>A いいえ。スリップは「失敗」ではなく、回復の過程で起こりうる出来事です。大切なのは、そこで支援とのつながりを切らさないこと。やり直しは、何度でもできます。</a:t>
-            </a:r>
-          </a:p>
-          <a:p>
-            <a:pPr>
-              <a:lnSpc>
-                <a:spcPct val="116000"/>
-              </a:lnSpc>
-              <a:spcBef>
-                <a:spcPts val="168"/>
-              </a:spcBef>
-              <a:spcAft>
-                <a:spcPts val="56"/>
-              </a:spcAft>
-            </a:pPr>
-            <a:r>
-              <a:rPr sz="588" b="1" i="0">
-                <a:solidFill>
-                  <a:srgbClr val="1B3358"/>
-                </a:solidFill>
-                <a:latin typeface="Yu Gothic"/>
-                <a:ea typeface="Yu Gothic"/>
-              </a:rPr>
-              <a:t>Q 回復には、どれくらい時間がかかりますか?</a:t>
-            </a:r>
-          </a:p>
-          <a:p>
-            <a:pPr>
-              <a:lnSpc>
-                <a:spcPct val="116000"/>
-              </a:lnSpc>
-              <a:spcBef>
-                <a:spcPts val="0"/>
-              </a:spcBef>
-              <a:spcAft>
-                <a:spcPts val="168"/>
-              </a:spcAft>
-            </a:pPr>
-            <a:r>
-              <a:rPr sz="560" b="0" i="0">
-                <a:solidFill>
-                  <a:srgbClr val="242C3A"/>
-                </a:solidFill>
-                <a:latin typeface="Yu Gothic"/>
-                <a:ea typeface="Yu Gothic"/>
-              </a:rPr>
-              <a:t>A 依存症は慢性の病気であり、回復は「治って終わり」ではなく、続けていくものです。期間には個人差があります。焦らず、長い目で、つながり続けることが何よりの力になります。</a:t>
-            </a:r>
-          </a:p>
-          <a:p>
-            <a:pPr>
-              <a:lnSpc>
-                <a:spcPct val="116000"/>
-              </a:lnSpc>
-              <a:spcBef>
-                <a:spcPts val="168"/>
-              </a:spcBef>
-              <a:spcAft>
-                <a:spcPts val="56"/>
-              </a:spcAft>
-            </a:pPr>
-            <a:r>
-              <a:rPr sz="588" b="1" i="0">
-                <a:solidFill>
-                  <a:srgbClr val="1B3358"/>
-                </a:solidFill>
-                <a:latin typeface="Yu Gothic"/>
-                <a:ea typeface="Yu Gothic"/>
-              </a:rPr>
-              <a:t>Q なぜ家庭ではなく、ダルクがいいのですか?</a:t>
-            </a:r>
-          </a:p>
-          <a:p>
-            <a:pPr>
-              <a:lnSpc>
-                <a:spcPct val="116000"/>
-              </a:lnSpc>
-              <a:spcBef>
-                <a:spcPts val="0"/>
-              </a:spcBef>
-              <a:spcAft>
-                <a:spcPts val="168"/>
-              </a:spcAft>
-            </a:pPr>
-            <a:r>
-              <a:rPr sz="560" b="0" i="0">
-                <a:solidFill>
-                  <a:srgbClr val="242C3A"/>
-                </a:solidFill>
-                <a:latin typeface="Yu Gothic"/>
-                <a:ea typeface="Yu Gothic"/>
-              </a:rPr>
-              <a:t>A 同じ経験をした仲間とスタッフがいる環境は、家庭では代わりにくいものです。正直に話せる場、回復のプログラム、日々の支え——これらがそろっているからこそ、回復に集中しやすいのです。</a:t>
-            </a:r>
-          </a:p>
-          <a:p>
-            <a:pPr>
-              <a:lnSpc>
-                <a:spcPct val="116000"/>
-              </a:lnSpc>
-              <a:spcBef>
-                <a:spcPts val="168"/>
-              </a:spcBef>
-              <a:spcAft>
-                <a:spcPts val="56"/>
-              </a:spcAft>
-            </a:pPr>
-            <a:r>
-              <a:rPr sz="588" b="1" i="0">
-                <a:solidFill>
-                  <a:srgbClr val="1B3358"/>
-                </a:solidFill>
-                <a:latin typeface="Yu Gothic"/>
-                <a:ea typeface="Yu Gothic"/>
-              </a:rPr>
-              <a:t>Q 本人が成人しています。それでも家族にできることは?</a:t>
-            </a:r>
-          </a:p>
-          <a:p>
-            <a:pPr>
-              <a:lnSpc>
-                <a:spcPct val="116000"/>
-              </a:lnSpc>
-              <a:spcBef>
-                <a:spcPts val="0"/>
-              </a:spcBef>
-              <a:spcAft>
-                <a:spcPts val="168"/>
-              </a:spcAft>
-            </a:pPr>
-            <a:r>
-              <a:rPr sz="560" b="0" i="0">
-                <a:solidFill>
-                  <a:srgbClr val="242C3A"/>
-                </a:solidFill>
-                <a:latin typeface="Yu Gothic"/>
-                <a:ea typeface="Yu Gothic"/>
-              </a:rPr>
-              <a:t>A たくさんあります。本人を直接変えることはできませんが、家族が関わり方を変え、支援とつながることは、回復の環境を大きく左右します。何歳であっても、家族の力は無力ではありません。</a:t>
-            </a:r>
-          </a:p>
-          <a:p>
-            <a:pPr>
-              <a:lnSpc>
-                <a:spcPct val="116000"/>
-              </a:lnSpc>
-              <a:spcBef>
-                <a:spcPts val="168"/>
-              </a:spcBef>
-              <a:spcAft>
-                <a:spcPts val="56"/>
-              </a:spcAft>
-            </a:pPr>
-            <a:r>
-              <a:rPr sz="588" b="1" i="0">
-                <a:solidFill>
-                  <a:srgbClr val="1B3358"/>
-                </a:solidFill>
-                <a:latin typeface="Yu Gothic"/>
-                <a:ea typeface="Yu Gothic"/>
-              </a:rPr>
-              <a:t>Q 費用のことが心配です。</a:t>
-            </a:r>
-          </a:p>
-          <a:p>
-            <a:pPr>
-              <a:lnSpc>
-                <a:spcPct val="116000"/>
-              </a:lnSpc>
-              <a:spcBef>
-                <a:spcPts val="0"/>
-              </a:spcBef>
-              <a:spcAft>
-                <a:spcPts val="168"/>
-              </a:spcAft>
-            </a:pPr>
-            <a:r>
-              <a:rPr sz="560" b="0" i="0">
-                <a:solidFill>
-                  <a:srgbClr val="242C3A"/>
-                </a:solidFill>
-                <a:latin typeface="Yu Gothic"/>
-                <a:ea typeface="Yu Gothic"/>
-              </a:rPr>
-              <a:t>A 費用や利用の仕組みについては、状況に応じてご案内します。経済的な不安があること自体、遠慮なくご相談ください。使える制度や方法を、一緒に考えます。</a:t>
-            </a:r>
-          </a:p>
-          <a:p>
-            <a:pPr>
-              <a:lnSpc>
-                <a:spcPct val="116000"/>
-              </a:lnSpc>
-              <a:spcBef>
-                <a:spcPts val="168"/>
-              </a:spcBef>
-              <a:spcAft>
-                <a:spcPts val="56"/>
-              </a:spcAft>
-            </a:pPr>
-            <a:r>
-              <a:rPr sz="588" b="1" i="0">
-                <a:solidFill>
-                  <a:srgbClr val="1B3358"/>
-                </a:solidFill>
-                <a:latin typeface="Yu Gothic"/>
-                <a:ea typeface="Yu Gothic"/>
-              </a:rPr>
-              <a:t>Q 本人がダルクを嫌がって出てきてしまいます。</a:t>
-            </a:r>
-          </a:p>
-          <a:p>
-            <a:pPr>
-              <a:lnSpc>
-                <a:spcPct val="116000"/>
-              </a:lnSpc>
-              <a:spcBef>
-                <a:spcPts val="0"/>
-              </a:spcBef>
-              <a:spcAft>
-                <a:spcPts val="168"/>
-              </a:spcAft>
-            </a:pPr>
-            <a:r>
-              <a:rPr sz="560" b="0" i="0">
-                <a:solidFill>
-                  <a:srgbClr val="242C3A"/>
-                </a:solidFill>
-                <a:latin typeface="Yu Gothic"/>
-                <a:ea typeface="Yu Gothic"/>
-              </a:rPr>
-              <a:t>A 入寮と退寮を繰り返すことは、珍しいことではありません。そのたびに家族が受け皿になってしまうと回復が遠のきます。「戻る場所はダルク」と伝え、そのつど私たちと連携してください。</a:t>
-            </a:r>
-          </a:p>
-          <a:p>
-            <a:pPr>
-              <a:lnSpc>
-                <a:spcPct val="116000"/>
-              </a:lnSpc>
-              <a:spcBef>
-                <a:spcPts val="168"/>
-              </a:spcBef>
-              <a:spcAft>
-                <a:spcPts val="56"/>
-              </a:spcAft>
-            </a:pPr>
-            <a:r>
-              <a:rPr sz="588" b="1" i="0">
-                <a:solidFill>
-                  <a:srgbClr val="1B3358"/>
-                </a:solidFill>
-                <a:latin typeface="Yu Gothic"/>
-                <a:ea typeface="Yu Gothic"/>
-              </a:rPr>
-              <a:t>Q 自分の時間を持つことに、罪悪感があります。</a:t>
-            </a:r>
-          </a:p>
-          <a:p>
-            <a:pPr>
-              <a:lnSpc>
-                <a:spcPct val="116000"/>
-              </a:lnSpc>
-              <a:spcBef>
-                <a:spcPts val="0"/>
-              </a:spcBef>
-              <a:spcAft>
-                <a:spcPts val="168"/>
-              </a:spcAft>
-            </a:pPr>
-            <a:r>
-              <a:rPr sz="560" b="0" i="0">
-                <a:solidFill>
-                  <a:srgbClr val="242C3A"/>
-                </a:solidFill>
-                <a:latin typeface="Yu Gothic"/>
-                <a:ea typeface="Yu Gothic"/>
-              </a:rPr>
-              <a:t>A 本人が苦しんでいるのに、自分が楽しんでいいのか——多くのご家族が同じように感じます。けれど、あなたが休むことは、わがままではありません。支える人が倒れないことこそ、回復の土台です。</a:t>
-            </a:r>
-          </a:p>
-          <a:p>
-            <a:pPr>
-              <a:lnSpc>
-                <a:spcPct val="116000"/>
-              </a:lnSpc>
-              <a:spcBef>
-                <a:spcPts val="168"/>
-              </a:spcBef>
-              <a:spcAft>
-                <a:spcPts val="56"/>
-              </a:spcAft>
-            </a:pPr>
-            <a:r>
-              <a:rPr sz="588" b="1" i="0">
-                <a:solidFill>
-                  <a:srgbClr val="1B3358"/>
-                </a:solidFill>
-                <a:latin typeface="Yu Gothic"/>
-                <a:ea typeface="Yu Gothic"/>
-              </a:rPr>
-              <a:t>Q 眠れない・気分が落ち込むのが続いています。</a:t>
-            </a:r>
-          </a:p>
-          <a:p>
-            <a:pPr>
-              <a:lnSpc>
-                <a:spcPct val="116000"/>
-              </a:lnSpc>
-              <a:spcBef>
-                <a:spcPts val="0"/>
-              </a:spcBef>
-              <a:spcAft>
-                <a:spcPts val="168"/>
-              </a:spcAft>
-            </a:pPr>
-            <a:r>
-              <a:rPr sz="560" b="0" i="0">
-                <a:solidFill>
-                  <a:srgbClr val="242C3A"/>
-                </a:solidFill>
-                <a:latin typeface="Yu Gothic"/>
-                <a:ea typeface="Yu Gothic"/>
-              </a:rPr>
-              <a:t>A それは、長い緊張による、心と体からのサインです。我慢せず、医療機関や相談窓口を頼ってください。ご家族自身のケアも、私たちが一緒に考えます。</a:t>
-            </a:r>
-          </a:p>
-          <a:p>
-            <a:pPr>
-              <a:lnSpc>
-                <a:spcPct val="116000"/>
-              </a:lnSpc>
-              <a:spcBef>
-                <a:spcPts val="168"/>
-              </a:spcBef>
-              <a:spcAft>
-                <a:spcPts val="56"/>
-              </a:spcAft>
-            </a:pPr>
-            <a:r>
-              <a:rPr sz="588" b="1" i="0">
-                <a:solidFill>
-                  <a:srgbClr val="1B3358"/>
-                </a:solidFill>
-                <a:latin typeface="Yu Gothic"/>
-                <a:ea typeface="Yu Gothic"/>
-              </a:rPr>
-              <a:t>Q 周りに相談できる人がいません。</a:t>
-            </a:r>
-          </a:p>
-          <a:p>
-            <a:pPr>
-              <a:lnSpc>
-                <a:spcPct val="116000"/>
-              </a:lnSpc>
-              <a:spcBef>
-                <a:spcPts val="0"/>
-              </a:spcBef>
-              <a:spcAft>
-                <a:spcPts val="168"/>
-              </a:spcAft>
-            </a:pPr>
-            <a:r>
-              <a:rPr sz="560" b="0" i="0">
-                <a:solidFill>
-                  <a:srgbClr val="242C3A"/>
-                </a:solidFill>
-                <a:latin typeface="Yu Gothic"/>
-                <a:ea typeface="Yu Gothic"/>
-              </a:rPr>
-              <a:t>A この病気は、人に打ち明けにくいものです。だからこそ、同じ経験をした家族が集まる家族会があります。ここでは、誰にも言えなかったことを、安心して話すことができます。</a:t>
-            </a:r>
-          </a:p>
-          <a:p>
-            <a:pPr>
-              <a:lnSpc>
-                <a:spcPct val="116000"/>
-              </a:lnSpc>
-              <a:spcBef>
-                <a:spcPts val="168"/>
-              </a:spcBef>
-              <a:spcAft>
-                <a:spcPts val="56"/>
-              </a:spcAft>
-            </a:pPr>
-            <a:r>
-              <a:rPr sz="588" b="1" i="0">
-                <a:solidFill>
-                  <a:srgbClr val="1B3358"/>
-                </a:solidFill>
-                <a:latin typeface="Yu Gothic"/>
-                <a:ea typeface="Yu Gothic"/>
-              </a:rPr>
-              <a:t>Q この冊子のとおりにできる自信がありません。</a:t>
-            </a:r>
-          </a:p>
-          <a:p>
-            <a:pPr>
-              <a:lnSpc>
-                <a:spcPct val="116000"/>
-              </a:lnSpc>
-              <a:spcBef>
-                <a:spcPts val="0"/>
-              </a:spcBef>
-              <a:spcAft>
-                <a:spcPts val="168"/>
-              </a:spcAft>
-            </a:pPr>
-            <a:r>
-              <a:rPr sz="560" b="0" i="0">
-                <a:solidFill>
-                  <a:srgbClr val="242C3A"/>
-                </a:solidFill>
-                <a:latin typeface="Yu Gothic"/>
-                <a:ea typeface="Yu Gothic"/>
-              </a:rPr>
-              <a:t>A 大丈夫です。完璧にできる必要はありません。少しずつで構いませんし、迷って当然です。うまくいかない日があっても、そのつどダルクへ相談してください。一人で頑張らなくていいのです。</a:t>
-            </a:r>
-          </a:p>
-          <a:p>
-            <a:pPr>
-              <a:lnSpc>
-                <a:spcPct val="116000"/>
-              </a:lnSpc>
-              <a:spcBef>
-                <a:spcPts val="168"/>
-              </a:spcBef>
-              <a:spcAft>
-                <a:spcPts val="56"/>
-              </a:spcAft>
-            </a:pPr>
-            <a:r>
-              <a:rPr sz="588" b="1" i="0">
-                <a:solidFill>
-                  <a:srgbClr val="1B3358"/>
-                </a:solidFill>
-                <a:latin typeface="Yu Gothic"/>
-                <a:ea typeface="Yu Gothic"/>
-              </a:rPr>
-              <a:t>Q 何から始めればいいか、分かりません。</a:t>
-            </a:r>
-          </a:p>
-          <a:p>
-            <a:pPr>
-              <a:lnSpc>
-                <a:spcPct val="116000"/>
-              </a:lnSpc>
-              <a:spcBef>
-                <a:spcPts val="0"/>
-              </a:spcBef>
-              <a:spcAft>
-                <a:spcPts val="168"/>
-              </a:spcAft>
-            </a:pPr>
-            <a:r>
-              <a:rPr sz="560" b="0" i="0">
-                <a:solidFill>
-                  <a:srgbClr val="242C3A"/>
-                </a:solidFill>
-                <a:latin typeface="Yu Gothic"/>
-                <a:ea typeface="Yu Gothic"/>
-              </a:rPr>
-              <a:t>A まずは、相模原ダルクへ一本、電話をかけてみてください。あるいは、次の家族会に足を運んでみてください。その一歩が、ご家族の回復の始まりになります。あなたは、一人ではありません。</a:t>
-            </a:r>
-          </a:p>
-          <a:p>
-            <a:pPr>
-              <a:lnSpc>
-                <a:spcPct val="116000"/>
-              </a:lnSpc>
-              <a:spcBef>
-                <a:spcPts val="168"/>
-              </a:spcBef>
-              <a:spcAft>
-                <a:spcPts val="56"/>
-              </a:spcAft>
-            </a:pPr>
-            <a:r>
-              <a:rPr sz="588" b="1" i="0">
-                <a:solidFill>
-                  <a:srgbClr val="1B3358"/>
-                </a:solidFill>
-                <a:latin typeface="Yu Gothic"/>
-                <a:ea typeface="Yu Gothic"/>
-              </a:rPr>
-              <a:t>Q 本人がいない今、私は何をすればいいですか?</a:t>
-            </a:r>
-          </a:p>
-          <a:p>
-            <a:pPr>
-              <a:lnSpc>
-                <a:spcPct val="116000"/>
-              </a:lnSpc>
-              <a:spcBef>
-                <a:spcPts val="0"/>
-              </a:spcBef>
-              <a:spcAft>
-                <a:spcPts val="168"/>
-              </a:spcAft>
-            </a:pPr>
-            <a:r>
-              <a:rPr sz="560" b="0" i="0">
-                <a:solidFill>
-                  <a:srgbClr val="242C3A"/>
-                </a:solidFill>
-                <a:latin typeface="Yu Gothic"/>
-                <a:ea typeface="Yu Gothic"/>
-              </a:rPr>
-              <a:t>A 今は、ご家族自身が回復に向かう大切な時間です。家族会で学び、休息をとり、生活を立て直していく。ご家族が落ち着きを取り戻すことは、いつか本人が戻ってくるための、いちばんの備えになります。</a:t>
             </a:r>
           </a:p>
         </p:txBody>
@@ -6765,6 +6448,777 @@
 </file>
 
 <file path=ppt/slides/slide14.xml><?xml version="1.0" encoding="utf-8"?>
+<p:sld xmlns:a="http://schemas.openxmlformats.org/drawingml/2006/main" xmlns:p="http://schemas.openxmlformats.org/presentationml/2006/main" xmlns:r="http://schemas.openxmlformats.org/officeDocument/2006/relationships">
+  <p:cSld>
+    <p:spTree>
+      <p:nvGrpSpPr>
+        <p:cNvPr id="1" name=""/>
+        <p:cNvGrpSpPr/>
+        <p:nvPr/>
+      </p:nvGrpSpPr>
+      <p:grpSpPr/>
+      <p:sp>
+        <p:nvSpPr>
+          <p:cNvPr id="2" name="Rectangle 1"/>
+          <p:cNvSpPr/>
+          <p:nvPr/>
+        </p:nvSpPr>
+        <p:spPr>
+          <a:xfrm>
+            <a:off x="0" y="0"/>
+            <a:ext cx="7560000" cy="10692000"/>
+          </a:xfrm>
+          <a:prstGeom prst="rect">
+            <a:avLst/>
+          </a:prstGeom>
+          <a:solidFill>
+            <a:srgbClr val="F6F8FB"/>
+          </a:solidFill>
+          <a:ln>
+            <a:noFill/>
+          </a:ln>
+          <a:effectLst/>
+        </p:spPr>
+        <p:style>
+          <a:lnRef idx="1">
+            <a:schemeClr val="accent1"/>
+          </a:lnRef>
+          <a:fillRef idx="3">
+            <a:schemeClr val="accent1"/>
+          </a:fillRef>
+          <a:effectRef idx="2">
+            <a:schemeClr val="accent1"/>
+          </a:effectRef>
+          <a:fontRef idx="minor">
+            <a:schemeClr val="lt1"/>
+          </a:fontRef>
+        </p:style>
+        <p:txBody>
+          <a:bodyPr rtlCol="0" anchor="ctr"/>
+          <a:lstStyle/>
+          <a:p>
+            <a:pPr algn="ctr"/>
+          </a:p>
+        </p:txBody>
+      </p:sp>
+      <p:sp>
+        <p:nvSpPr>
+          <p:cNvPr id="3" name="Rectangle 2"/>
+          <p:cNvSpPr/>
+          <p:nvPr/>
+        </p:nvSpPr>
+        <p:spPr>
+          <a:xfrm>
+            <a:off x="0" y="0"/>
+            <a:ext cx="7560000" cy="720000"/>
+          </a:xfrm>
+          <a:prstGeom prst="rect">
+            <a:avLst/>
+          </a:prstGeom>
+          <a:solidFill>
+            <a:srgbClr val="1B3358"/>
+          </a:solidFill>
+          <a:ln>
+            <a:noFill/>
+          </a:ln>
+          <a:effectLst/>
+        </p:spPr>
+        <p:style>
+          <a:lnRef idx="1">
+            <a:schemeClr val="accent1"/>
+          </a:lnRef>
+          <a:fillRef idx="3">
+            <a:schemeClr val="accent1"/>
+          </a:fillRef>
+          <a:effectRef idx="2">
+            <a:schemeClr val="accent1"/>
+          </a:effectRef>
+          <a:fontRef idx="minor">
+            <a:schemeClr val="lt1"/>
+          </a:fontRef>
+        </p:style>
+        <p:txBody>
+          <a:bodyPr rtlCol="0" anchor="ctr"/>
+          <a:lstStyle/>
+          <a:p>
+            <a:pPr algn="ctr"/>
+          </a:p>
+        </p:txBody>
+      </p:sp>
+      <p:sp>
+        <p:nvSpPr>
+          <p:cNvPr id="4" name="Rectangle 3"/>
+          <p:cNvSpPr/>
+          <p:nvPr/>
+        </p:nvSpPr>
+        <p:spPr>
+          <a:xfrm>
+            <a:off x="0" y="0"/>
+            <a:ext cx="180000" cy="720000"/>
+          </a:xfrm>
+          <a:prstGeom prst="rect">
+            <a:avLst/>
+          </a:prstGeom>
+          <a:solidFill>
+            <a:srgbClr val="D69A5C"/>
+          </a:solidFill>
+          <a:ln>
+            <a:noFill/>
+          </a:ln>
+          <a:effectLst/>
+        </p:spPr>
+        <p:style>
+          <a:lnRef idx="1">
+            <a:schemeClr val="accent1"/>
+          </a:lnRef>
+          <a:fillRef idx="3">
+            <a:schemeClr val="accent1"/>
+          </a:fillRef>
+          <a:effectRef idx="2">
+            <a:schemeClr val="accent1"/>
+          </a:effectRef>
+          <a:fontRef idx="minor">
+            <a:schemeClr val="lt1"/>
+          </a:fontRef>
+        </p:style>
+        <p:txBody>
+          <a:bodyPr rtlCol="0" anchor="ctr"/>
+          <a:lstStyle/>
+          <a:p>
+            <a:pPr algn="ctr"/>
+          </a:p>
+        </p:txBody>
+      </p:sp>
+      <p:sp>
+        <p:nvSpPr>
+          <p:cNvPr id="5" name="TextBox 4"/>
+          <p:cNvSpPr txBox="1"/>
+          <p:nvPr/>
+        </p:nvSpPr>
+        <p:spPr>
+          <a:xfrm>
+            <a:off x="684000" y="36000"/>
+            <a:ext cx="6408000" cy="648000"/>
+          </a:xfrm>
+          <a:prstGeom prst="rect">
+            <a:avLst/>
+          </a:prstGeom>
+          <a:noFill/>
+        </p:spPr>
+        <p:txBody>
+          <a:bodyPr wrap="square" lIns="72000" rIns="72000" tIns="36000" bIns="36000" anchor="ctr">
+            <a:spAutoFit/>
+          </a:bodyPr>
+          <a:lstStyle/>
+          <a:p>
+            <a:pPr>
+              <a:lnSpc>
+                <a:spcPct val="116000"/>
+              </a:lnSpc>
+              <a:spcBef>
+                <a:spcPts val="0"/>
+              </a:spcBef>
+              <a:spcAft>
+                <a:spcPts val="0"/>
+              </a:spcAft>
+            </a:pPr>
+            <a:r>
+              <a:rPr sz="1300" b="1" i="0">
+                <a:solidFill>
+                  <a:srgbClr val="FFFFFF"/>
+                </a:solidFill>
+                <a:latin typeface="Yu Gothic"/>
+                <a:ea typeface="Yu Gothic"/>
+              </a:rPr>
+              <a:t>第10章　よくある質問 Q&amp;A</a:t>
+            </a:r>
+          </a:p>
+        </p:txBody>
+      </p:sp>
+      <p:sp>
+        <p:nvSpPr>
+          <p:cNvPr id="6" name="TextBox 5"/>
+          <p:cNvSpPr txBox="1"/>
+          <p:nvPr/>
+        </p:nvSpPr>
+        <p:spPr>
+          <a:xfrm>
+            <a:off x="576000" y="900000"/>
+            <a:ext cx="6408000" cy="9216000"/>
+          </a:xfrm>
+          <a:prstGeom prst="rect">
+            <a:avLst/>
+          </a:prstGeom>
+          <a:noFill/>
+        </p:spPr>
+        <p:txBody>
+          <a:bodyPr wrap="square" lIns="72000" rIns="72000" tIns="36000" bIns="36000" anchor="t">
+            <a:spAutoFit/>
+          </a:bodyPr>
+          <a:lstStyle/>
+          <a:p>
+            <a:pPr>
+              <a:lnSpc>
+                <a:spcPct val="116000"/>
+              </a:lnSpc>
+              <a:spcBef>
+                <a:spcPts val="300"/>
+              </a:spcBef>
+              <a:spcAft>
+                <a:spcPts val="100"/>
+              </a:spcAft>
+            </a:pPr>
+            <a:r>
+              <a:rPr sz="1050" b="1" i="0">
+                <a:solidFill>
+                  <a:srgbClr val="1B3358"/>
+                </a:solidFill>
+                <a:latin typeface="Yu Gothic"/>
+                <a:ea typeface="Yu Gothic"/>
+              </a:rPr>
+              <a:t>Q 一度スリップ（再使用）したら、もうだめですか?</a:t>
+            </a:r>
+          </a:p>
+          <a:p>
+            <a:pPr>
+              <a:lnSpc>
+                <a:spcPct val="116000"/>
+              </a:lnSpc>
+              <a:spcBef>
+                <a:spcPts val="0"/>
+              </a:spcBef>
+              <a:spcAft>
+                <a:spcPts val="300"/>
+              </a:spcAft>
+            </a:pPr>
+            <a:r>
+              <a:rPr sz="1000" b="0" i="0">
+                <a:solidFill>
+                  <a:srgbClr val="242C3A"/>
+                </a:solidFill>
+                <a:latin typeface="Yu Gothic"/>
+                <a:ea typeface="Yu Gothic"/>
+              </a:rPr>
+              <a:t>A いいえ。スリップは「失敗」ではなく、回復の過程で起こりうる出来事です。大切なのは、そこで支援とのつながりを切らさないこと。やり直しは、何度でもできます。</a:t>
+            </a:r>
+          </a:p>
+          <a:p>
+            <a:pPr>
+              <a:lnSpc>
+                <a:spcPct val="116000"/>
+              </a:lnSpc>
+              <a:spcBef>
+                <a:spcPts val="300"/>
+              </a:spcBef>
+              <a:spcAft>
+                <a:spcPts val="100"/>
+              </a:spcAft>
+            </a:pPr>
+            <a:r>
+              <a:rPr sz="1050" b="1" i="0">
+                <a:solidFill>
+                  <a:srgbClr val="1B3358"/>
+                </a:solidFill>
+                <a:latin typeface="Yu Gothic"/>
+                <a:ea typeface="Yu Gothic"/>
+              </a:rPr>
+              <a:t>Q 回復には、どれくらい時間がかかりますか?</a:t>
+            </a:r>
+          </a:p>
+          <a:p>
+            <a:pPr>
+              <a:lnSpc>
+                <a:spcPct val="116000"/>
+              </a:lnSpc>
+              <a:spcBef>
+                <a:spcPts val="0"/>
+              </a:spcBef>
+              <a:spcAft>
+                <a:spcPts val="300"/>
+              </a:spcAft>
+            </a:pPr>
+            <a:r>
+              <a:rPr sz="1000" b="0" i="0">
+                <a:solidFill>
+                  <a:srgbClr val="242C3A"/>
+                </a:solidFill>
+                <a:latin typeface="Yu Gothic"/>
+                <a:ea typeface="Yu Gothic"/>
+              </a:rPr>
+              <a:t>A 依存症は慢性の病気であり、回復は「治って終わり」ではなく、続けていくものです。期間には個人差があります。焦らず、長い目で、つながり続けることが何よりの力になります。</a:t>
+            </a:r>
+          </a:p>
+          <a:p>
+            <a:pPr>
+              <a:lnSpc>
+                <a:spcPct val="116000"/>
+              </a:lnSpc>
+              <a:spcBef>
+                <a:spcPts val="300"/>
+              </a:spcBef>
+              <a:spcAft>
+                <a:spcPts val="100"/>
+              </a:spcAft>
+            </a:pPr>
+            <a:r>
+              <a:rPr sz="1050" b="1" i="0">
+                <a:solidFill>
+                  <a:srgbClr val="1B3358"/>
+                </a:solidFill>
+                <a:latin typeface="Yu Gothic"/>
+                <a:ea typeface="Yu Gothic"/>
+              </a:rPr>
+              <a:t>Q なぜ家庭ではなく、ダルクがいいのですか?</a:t>
+            </a:r>
+          </a:p>
+          <a:p>
+            <a:pPr>
+              <a:lnSpc>
+                <a:spcPct val="116000"/>
+              </a:lnSpc>
+              <a:spcBef>
+                <a:spcPts val="0"/>
+              </a:spcBef>
+              <a:spcAft>
+                <a:spcPts val="300"/>
+              </a:spcAft>
+            </a:pPr>
+            <a:r>
+              <a:rPr sz="1000" b="0" i="0">
+                <a:solidFill>
+                  <a:srgbClr val="242C3A"/>
+                </a:solidFill>
+                <a:latin typeface="Yu Gothic"/>
+                <a:ea typeface="Yu Gothic"/>
+              </a:rPr>
+              <a:t>A 同じ経験をした仲間とスタッフがいる環境は、家庭では代わりにくいものです。正直に話せる場、回復のプログラム、日々の支え——これらがそろっているからこそ、回復に集中しやすいのです。</a:t>
+            </a:r>
+          </a:p>
+          <a:p>
+            <a:pPr>
+              <a:lnSpc>
+                <a:spcPct val="116000"/>
+              </a:lnSpc>
+              <a:spcBef>
+                <a:spcPts val="300"/>
+              </a:spcBef>
+              <a:spcAft>
+                <a:spcPts val="100"/>
+              </a:spcAft>
+            </a:pPr>
+            <a:r>
+              <a:rPr sz="1050" b="1" i="0">
+                <a:solidFill>
+                  <a:srgbClr val="1B3358"/>
+                </a:solidFill>
+                <a:latin typeface="Yu Gothic"/>
+                <a:ea typeface="Yu Gothic"/>
+              </a:rPr>
+              <a:t>Q 本人が成人しています。それでも家族にできることは?</a:t>
+            </a:r>
+          </a:p>
+          <a:p>
+            <a:pPr>
+              <a:lnSpc>
+                <a:spcPct val="116000"/>
+              </a:lnSpc>
+              <a:spcBef>
+                <a:spcPts val="0"/>
+              </a:spcBef>
+              <a:spcAft>
+                <a:spcPts val="300"/>
+              </a:spcAft>
+            </a:pPr>
+            <a:r>
+              <a:rPr sz="1000" b="0" i="0">
+                <a:solidFill>
+                  <a:srgbClr val="242C3A"/>
+                </a:solidFill>
+                <a:latin typeface="Yu Gothic"/>
+                <a:ea typeface="Yu Gothic"/>
+              </a:rPr>
+              <a:t>A たくさんあります。本人を直接変えることはできませんが、家族が関わり方を変え、支援とつながることは、回復の環境を大きく左右します。何歳であっても、家族の力は無力ではありません。</a:t>
+            </a:r>
+          </a:p>
+          <a:p>
+            <a:pPr>
+              <a:lnSpc>
+                <a:spcPct val="116000"/>
+              </a:lnSpc>
+              <a:spcBef>
+                <a:spcPts val="300"/>
+              </a:spcBef>
+              <a:spcAft>
+                <a:spcPts val="100"/>
+              </a:spcAft>
+            </a:pPr>
+            <a:r>
+              <a:rPr sz="1050" b="1" i="0">
+                <a:solidFill>
+                  <a:srgbClr val="1B3358"/>
+                </a:solidFill>
+                <a:latin typeface="Yu Gothic"/>
+                <a:ea typeface="Yu Gothic"/>
+              </a:rPr>
+              <a:t>Q 費用のことが心配です。</a:t>
+            </a:r>
+          </a:p>
+          <a:p>
+            <a:pPr>
+              <a:lnSpc>
+                <a:spcPct val="116000"/>
+              </a:lnSpc>
+              <a:spcBef>
+                <a:spcPts val="0"/>
+              </a:spcBef>
+              <a:spcAft>
+                <a:spcPts val="300"/>
+              </a:spcAft>
+            </a:pPr>
+            <a:r>
+              <a:rPr sz="1000" b="0" i="0">
+                <a:solidFill>
+                  <a:srgbClr val="242C3A"/>
+                </a:solidFill>
+                <a:latin typeface="Yu Gothic"/>
+                <a:ea typeface="Yu Gothic"/>
+              </a:rPr>
+              <a:t>A 費用や利用の仕組みについては、状況に応じてご案内します。経済的な不安があること自体、遠慮なくご相談ください。使える制度や方法を、一緒に考えます。</a:t>
+            </a:r>
+          </a:p>
+          <a:p>
+            <a:pPr>
+              <a:lnSpc>
+                <a:spcPct val="116000"/>
+              </a:lnSpc>
+              <a:spcBef>
+                <a:spcPts val="300"/>
+              </a:spcBef>
+              <a:spcAft>
+                <a:spcPts val="100"/>
+              </a:spcAft>
+            </a:pPr>
+            <a:r>
+              <a:rPr sz="1050" b="1" i="0">
+                <a:solidFill>
+                  <a:srgbClr val="1B3358"/>
+                </a:solidFill>
+                <a:latin typeface="Yu Gothic"/>
+                <a:ea typeface="Yu Gothic"/>
+              </a:rPr>
+              <a:t>Q 本人がダルクを嫌がって出てきてしまいます。</a:t>
+            </a:r>
+          </a:p>
+          <a:p>
+            <a:pPr>
+              <a:lnSpc>
+                <a:spcPct val="116000"/>
+              </a:lnSpc>
+              <a:spcBef>
+                <a:spcPts val="0"/>
+              </a:spcBef>
+              <a:spcAft>
+                <a:spcPts val="300"/>
+              </a:spcAft>
+            </a:pPr>
+            <a:r>
+              <a:rPr sz="1000" b="0" i="0">
+                <a:solidFill>
+                  <a:srgbClr val="242C3A"/>
+                </a:solidFill>
+                <a:latin typeface="Yu Gothic"/>
+                <a:ea typeface="Yu Gothic"/>
+              </a:rPr>
+              <a:t>A 入寮と退寮を繰り返すことは、珍しいことではありません。そのたびに家族が受け皿になってしまうと回復が遠のきます。「戻る場所はダルク」と伝え、そのつど私たちと連携してください。</a:t>
+            </a:r>
+          </a:p>
+          <a:p>
+            <a:pPr>
+              <a:lnSpc>
+                <a:spcPct val="116000"/>
+              </a:lnSpc>
+              <a:spcBef>
+                <a:spcPts val="300"/>
+              </a:spcBef>
+              <a:spcAft>
+                <a:spcPts val="100"/>
+              </a:spcAft>
+            </a:pPr>
+            <a:r>
+              <a:rPr sz="1050" b="1" i="0">
+                <a:solidFill>
+                  <a:srgbClr val="1B3358"/>
+                </a:solidFill>
+                <a:latin typeface="Yu Gothic"/>
+                <a:ea typeface="Yu Gothic"/>
+              </a:rPr>
+              <a:t>Q 自分の時間を持つことに、罪悪感があります。</a:t>
+            </a:r>
+          </a:p>
+          <a:p>
+            <a:pPr>
+              <a:lnSpc>
+                <a:spcPct val="116000"/>
+              </a:lnSpc>
+              <a:spcBef>
+                <a:spcPts val="0"/>
+              </a:spcBef>
+              <a:spcAft>
+                <a:spcPts val="300"/>
+              </a:spcAft>
+            </a:pPr>
+            <a:r>
+              <a:rPr sz="1000" b="0" i="0">
+                <a:solidFill>
+                  <a:srgbClr val="242C3A"/>
+                </a:solidFill>
+                <a:latin typeface="Yu Gothic"/>
+                <a:ea typeface="Yu Gothic"/>
+              </a:rPr>
+              <a:t>A 本人が苦しんでいるのに、自分が楽しんでいいのか——多くのご家族が同じように感じます。けれど、あなたが休むことは、わがままではありません。支える人が倒れないことこそ、回復の土台です。</a:t>
+            </a:r>
+          </a:p>
+          <a:p>
+            <a:pPr>
+              <a:lnSpc>
+                <a:spcPct val="116000"/>
+              </a:lnSpc>
+              <a:spcBef>
+                <a:spcPts val="300"/>
+              </a:spcBef>
+              <a:spcAft>
+                <a:spcPts val="100"/>
+              </a:spcAft>
+            </a:pPr>
+            <a:r>
+              <a:rPr sz="1050" b="1" i="0">
+                <a:solidFill>
+                  <a:srgbClr val="1B3358"/>
+                </a:solidFill>
+                <a:latin typeface="Yu Gothic"/>
+                <a:ea typeface="Yu Gothic"/>
+              </a:rPr>
+              <a:t>Q 眠れない・気分が落ち込むのが続いています。</a:t>
+            </a:r>
+          </a:p>
+          <a:p>
+            <a:pPr>
+              <a:lnSpc>
+                <a:spcPct val="116000"/>
+              </a:lnSpc>
+              <a:spcBef>
+                <a:spcPts val="0"/>
+              </a:spcBef>
+              <a:spcAft>
+                <a:spcPts val="300"/>
+              </a:spcAft>
+            </a:pPr>
+            <a:r>
+              <a:rPr sz="1000" b="0" i="0">
+                <a:solidFill>
+                  <a:srgbClr val="242C3A"/>
+                </a:solidFill>
+                <a:latin typeface="Yu Gothic"/>
+                <a:ea typeface="Yu Gothic"/>
+              </a:rPr>
+              <a:t>A それは、長い緊張による、心と体からのサインです。我慢せず、医療機関や相談窓口を頼ってください。ご家族自身のケアも、私たちが一緒に考えます。</a:t>
+            </a:r>
+          </a:p>
+          <a:p>
+            <a:pPr>
+              <a:lnSpc>
+                <a:spcPct val="116000"/>
+              </a:lnSpc>
+              <a:spcBef>
+                <a:spcPts val="300"/>
+              </a:spcBef>
+              <a:spcAft>
+                <a:spcPts val="100"/>
+              </a:spcAft>
+            </a:pPr>
+            <a:r>
+              <a:rPr sz="1050" b="1" i="0">
+                <a:solidFill>
+                  <a:srgbClr val="1B3358"/>
+                </a:solidFill>
+                <a:latin typeface="Yu Gothic"/>
+                <a:ea typeface="Yu Gothic"/>
+              </a:rPr>
+              <a:t>Q 周りに相談できる人がいません。</a:t>
+            </a:r>
+          </a:p>
+          <a:p>
+            <a:pPr>
+              <a:lnSpc>
+                <a:spcPct val="116000"/>
+              </a:lnSpc>
+              <a:spcBef>
+                <a:spcPts val="0"/>
+              </a:spcBef>
+              <a:spcAft>
+                <a:spcPts val="300"/>
+              </a:spcAft>
+            </a:pPr>
+            <a:r>
+              <a:rPr sz="1000" b="0" i="0">
+                <a:solidFill>
+                  <a:srgbClr val="242C3A"/>
+                </a:solidFill>
+                <a:latin typeface="Yu Gothic"/>
+                <a:ea typeface="Yu Gothic"/>
+              </a:rPr>
+              <a:t>A この病気は、人に打ち明けにくいものです。だからこそ、同じ経験をした家族が集まる家族会があります。ここでは、誰にも言えなかったことを、安心して話すことができます。</a:t>
+            </a:r>
+          </a:p>
+          <a:p>
+            <a:pPr>
+              <a:lnSpc>
+                <a:spcPct val="116000"/>
+              </a:lnSpc>
+              <a:spcBef>
+                <a:spcPts val="300"/>
+              </a:spcBef>
+              <a:spcAft>
+                <a:spcPts val="100"/>
+              </a:spcAft>
+            </a:pPr>
+            <a:r>
+              <a:rPr sz="1050" b="1" i="0">
+                <a:solidFill>
+                  <a:srgbClr val="1B3358"/>
+                </a:solidFill>
+                <a:latin typeface="Yu Gothic"/>
+                <a:ea typeface="Yu Gothic"/>
+              </a:rPr>
+              <a:t>Q この冊子のとおりにできる自信がありません。</a:t>
+            </a:r>
+          </a:p>
+          <a:p>
+            <a:pPr>
+              <a:lnSpc>
+                <a:spcPct val="116000"/>
+              </a:lnSpc>
+              <a:spcBef>
+                <a:spcPts val="0"/>
+              </a:spcBef>
+              <a:spcAft>
+                <a:spcPts val="300"/>
+              </a:spcAft>
+            </a:pPr>
+            <a:r>
+              <a:rPr sz="1000" b="0" i="0">
+                <a:solidFill>
+                  <a:srgbClr val="242C3A"/>
+                </a:solidFill>
+                <a:latin typeface="Yu Gothic"/>
+                <a:ea typeface="Yu Gothic"/>
+              </a:rPr>
+              <a:t>A 大丈夫です。完璧にできる必要はありません。少しずつで構いませんし、迷って当然です。うまくいかない日があっても、そのつどダルクへ相談してください。一人で頑張らなくていいのです。</a:t>
+            </a:r>
+          </a:p>
+          <a:p>
+            <a:pPr>
+              <a:lnSpc>
+                <a:spcPct val="116000"/>
+              </a:lnSpc>
+              <a:spcBef>
+                <a:spcPts val="300"/>
+              </a:spcBef>
+              <a:spcAft>
+                <a:spcPts val="100"/>
+              </a:spcAft>
+            </a:pPr>
+            <a:r>
+              <a:rPr sz="1050" b="1" i="0">
+                <a:solidFill>
+                  <a:srgbClr val="1B3358"/>
+                </a:solidFill>
+                <a:latin typeface="Yu Gothic"/>
+                <a:ea typeface="Yu Gothic"/>
+              </a:rPr>
+              <a:t>Q 何から始めればいいか、分かりません。</a:t>
+            </a:r>
+          </a:p>
+          <a:p>
+            <a:pPr>
+              <a:lnSpc>
+                <a:spcPct val="116000"/>
+              </a:lnSpc>
+              <a:spcBef>
+                <a:spcPts val="0"/>
+              </a:spcBef>
+              <a:spcAft>
+                <a:spcPts val="300"/>
+              </a:spcAft>
+            </a:pPr>
+            <a:r>
+              <a:rPr sz="1000" b="0" i="0">
+                <a:solidFill>
+                  <a:srgbClr val="242C3A"/>
+                </a:solidFill>
+                <a:latin typeface="Yu Gothic"/>
+                <a:ea typeface="Yu Gothic"/>
+              </a:rPr>
+              <a:t>A まずは、相模原ダルクへ一本、電話をかけてみてください。あるいは、次の家族会に足を運んでみてください。その一歩が、ご家族の回復の始まりになります。あなたは、一人ではありません。</a:t>
+            </a:r>
+          </a:p>
+          <a:p>
+            <a:pPr>
+              <a:lnSpc>
+                <a:spcPct val="116000"/>
+              </a:lnSpc>
+              <a:spcBef>
+                <a:spcPts val="300"/>
+              </a:spcBef>
+              <a:spcAft>
+                <a:spcPts val="100"/>
+              </a:spcAft>
+            </a:pPr>
+            <a:r>
+              <a:rPr sz="1050" b="1" i="0">
+                <a:solidFill>
+                  <a:srgbClr val="1B3358"/>
+                </a:solidFill>
+                <a:latin typeface="Yu Gothic"/>
+                <a:ea typeface="Yu Gothic"/>
+              </a:rPr>
+              <a:t>Q 本人がいない今、私は何をすればいいですか?</a:t>
+            </a:r>
+          </a:p>
+          <a:p>
+            <a:pPr>
+              <a:lnSpc>
+                <a:spcPct val="116000"/>
+              </a:lnSpc>
+              <a:spcBef>
+                <a:spcPts val="0"/>
+              </a:spcBef>
+              <a:spcAft>
+                <a:spcPts val="300"/>
+              </a:spcAft>
+            </a:pPr>
+            <a:r>
+              <a:rPr sz="1000" b="0" i="0">
+                <a:solidFill>
+                  <a:srgbClr val="242C3A"/>
+                </a:solidFill>
+                <a:latin typeface="Yu Gothic"/>
+                <a:ea typeface="Yu Gothic"/>
+              </a:rPr>
+              <a:t>A 今は、ご家族自身が回復に向かう大切な時間です。家族会で学び、休息をとり、生活を立て直していく。ご家族が落ち着きを取り戻すことは、いつか本人が戻ってくるための、いちばんの備えになります。</a:t>
+            </a:r>
+          </a:p>
+        </p:txBody>
+      </p:sp>
+    </p:spTree>
+  </p:cSld>
+  <p:clrMapOvr>
+    <a:masterClrMapping/>
+  </p:clrMapOvr>
+</p:sld>
+</file>
+
+<file path=ppt/slides/slide15.xml><?xml version="1.0" encoding="utf-8"?>
 <p:sld xmlns:a="http://schemas.openxmlformats.org/drawingml/2006/main" xmlns:p="http://schemas.openxmlformats.org/presentationml/2006/main" xmlns:r="http://schemas.openxmlformats.org/officeDocument/2006/relationships">
   <p:cSld>
     <p:spTree>
@@ -7723,7 +8177,7 @@
 </p:sld>
 </file>
 
-<file path=ppt/slides/slide15.xml><?xml version="1.0" encoding="utf-8"?>
+<file path=ppt/slides/slide16.xml><?xml version="1.0" encoding="utf-8"?>
 <p:sld xmlns:a="http://schemas.openxmlformats.org/drawingml/2006/main" xmlns:p="http://schemas.openxmlformats.org/presentationml/2006/main" xmlns:r="http://schemas.openxmlformats.org/officeDocument/2006/relationships">
   <p:cSld>
     <p:spTree>
@@ -8237,6 +8691,123 @@
           </a:p>
         </p:txBody>
       </p:sp>
+      <p:pic>
+        <p:nvPicPr>
+          <p:cNvPr id="8" name="Picture 7" descr="image.jpg"/>
+          <p:cNvPicPr>
+            <a:picLocks noChangeAspect="1"/>
+          </p:cNvPicPr>
+          <p:nvPr/>
+        </p:nvPicPr>
+        <p:blipFill>
+          <a:blip r:embed="rId3"/>
+          <a:srcRect t="14999" b="14999"/>
+          <a:stretch>
+            <a:fillRect/>
+          </a:stretch>
+        </p:blipFill>
+        <p:spPr>
+          <a:xfrm>
+            <a:off x="576000" y="6747616"/>
+            <a:ext cx="6408000" cy="3368383"/>
+          </a:xfrm>
+          <a:prstGeom prst="rect">
+            <a:avLst/>
+          </a:prstGeom>
+        </p:spPr>
+      </p:pic>
+      <p:sp>
+        <p:nvSpPr>
+          <p:cNvPr id="9" name="Rectangle 8"/>
+          <p:cNvSpPr/>
+          <p:nvPr/>
+        </p:nvSpPr>
+        <p:spPr>
+          <a:xfrm>
+            <a:off x="576000" y="9792000"/>
+            <a:ext cx="6408000" cy="324000"/>
+          </a:xfrm>
+          <a:prstGeom prst="rect">
+            <a:avLst/>
+          </a:prstGeom>
+          <a:solidFill>
+            <a:srgbClr val="142744">
+              <a:alpha val="48000"/>
+            </a:srgbClr>
+          </a:solidFill>
+          <a:ln>
+            <a:noFill/>
+          </a:ln>
+          <a:effectLst/>
+        </p:spPr>
+        <p:style>
+          <a:lnRef idx="1">
+            <a:schemeClr val="accent1"/>
+          </a:lnRef>
+          <a:fillRef idx="3">
+            <a:schemeClr val="accent1"/>
+          </a:fillRef>
+          <a:effectRef idx="2">
+            <a:schemeClr val="accent1"/>
+          </a:effectRef>
+          <a:fontRef idx="minor">
+            <a:schemeClr val="lt1"/>
+          </a:fontRef>
+        </p:style>
+        <p:txBody>
+          <a:bodyPr rtlCol="0" anchor="ctr"/>
+          <a:lstStyle/>
+          <a:p>
+            <a:pPr algn="ctr"/>
+          </a:p>
+        </p:txBody>
+      </p:sp>
+      <p:sp>
+        <p:nvSpPr>
+          <p:cNvPr id="10" name="TextBox 9"/>
+          <p:cNvSpPr txBox="1"/>
+          <p:nvPr/>
+        </p:nvSpPr>
+        <p:spPr>
+          <a:xfrm>
+            <a:off x="684000" y="9792000"/>
+            <a:ext cx="6192000" cy="324000"/>
+          </a:xfrm>
+          <a:prstGeom prst="rect">
+            <a:avLst/>
+          </a:prstGeom>
+          <a:noFill/>
+        </p:spPr>
+        <p:txBody>
+          <a:bodyPr wrap="square" lIns="72000" rIns="72000" tIns="36000" bIns="36000" anchor="ctr">
+            <a:spAutoFit/>
+          </a:bodyPr>
+          <a:lstStyle/>
+          <a:p>
+            <a:pPr>
+              <a:lnSpc>
+                <a:spcPct val="116000"/>
+              </a:lnSpc>
+              <a:spcBef>
+                <a:spcPts val="0"/>
+              </a:spcBef>
+              <a:spcAft>
+                <a:spcPts val="0"/>
+              </a:spcAft>
+            </a:pPr>
+            <a:r>
+              <a:rPr sz="850" b="0" i="0">
+                <a:solidFill>
+                  <a:srgbClr val="FFFFFF"/>
+                </a:solidFill>
+                <a:latin typeface="Yu Gothic"/>
+                <a:ea typeface="Yu Gothic"/>
+              </a:rPr>
+              <a:t>回復を経験した当事者スタッフが伴走します</a:t>
+            </a:r>
+          </a:p>
+        </p:txBody>
+      </p:sp>
     </p:spTree>
   </p:cSld>
   <p:clrMapOvr>
@@ -8245,7 +8816,7 @@
 </p:sld>
 </file>
 
-<file path=ppt/slides/slide16.xml><?xml version="1.0" encoding="utf-8"?>
+<file path=ppt/slides/slide17.xml><?xml version="1.0" encoding="utf-8"?>
 <p:sld xmlns:a="http://schemas.openxmlformats.org/drawingml/2006/main" xmlns:p="http://schemas.openxmlformats.org/presentationml/2006/main" xmlns:r="http://schemas.openxmlformats.org/officeDocument/2006/relationships">
   <p:cSld>
     <p:spTree>
@@ -8690,6 +9261,123 @@
           </a:p>
         </p:txBody>
       </p:sp>
+      <p:pic>
+        <p:nvPicPr>
+          <p:cNvPr id="8" name="Picture 7" descr="image.jpg"/>
+          <p:cNvPicPr>
+            <a:picLocks noChangeAspect="1"/>
+          </p:cNvPicPr>
+          <p:nvPr/>
+        </p:nvPicPr>
+        <p:blipFill>
+          <a:blip r:embed="rId3"/>
+          <a:srcRect l="6038" r="6038"/>
+          <a:stretch>
+            <a:fillRect/>
+          </a:stretch>
+        </p:blipFill>
+        <p:spPr>
+          <a:xfrm>
+            <a:off x="576000" y="5259123"/>
+            <a:ext cx="6408000" cy="4856876"/>
+          </a:xfrm>
+          <a:prstGeom prst="rect">
+            <a:avLst/>
+          </a:prstGeom>
+        </p:spPr>
+      </p:pic>
+      <p:sp>
+        <p:nvSpPr>
+          <p:cNvPr id="9" name="Rectangle 8"/>
+          <p:cNvSpPr/>
+          <p:nvPr/>
+        </p:nvSpPr>
+        <p:spPr>
+          <a:xfrm>
+            <a:off x="576000" y="9792000"/>
+            <a:ext cx="6408000" cy="324000"/>
+          </a:xfrm>
+          <a:prstGeom prst="rect">
+            <a:avLst/>
+          </a:prstGeom>
+          <a:solidFill>
+            <a:srgbClr val="142744">
+              <a:alpha val="48000"/>
+            </a:srgbClr>
+          </a:solidFill>
+          <a:ln>
+            <a:noFill/>
+          </a:ln>
+          <a:effectLst/>
+        </p:spPr>
+        <p:style>
+          <a:lnRef idx="1">
+            <a:schemeClr val="accent1"/>
+          </a:lnRef>
+          <a:fillRef idx="3">
+            <a:schemeClr val="accent1"/>
+          </a:fillRef>
+          <a:effectRef idx="2">
+            <a:schemeClr val="accent1"/>
+          </a:effectRef>
+          <a:fontRef idx="minor">
+            <a:schemeClr val="lt1"/>
+          </a:fontRef>
+        </p:style>
+        <p:txBody>
+          <a:bodyPr rtlCol="0" anchor="ctr"/>
+          <a:lstStyle/>
+          <a:p>
+            <a:pPr algn="ctr"/>
+          </a:p>
+        </p:txBody>
+      </p:sp>
+      <p:sp>
+        <p:nvSpPr>
+          <p:cNvPr id="10" name="TextBox 9"/>
+          <p:cNvSpPr txBox="1"/>
+          <p:nvPr/>
+        </p:nvSpPr>
+        <p:spPr>
+          <a:xfrm>
+            <a:off x="684000" y="9792000"/>
+            <a:ext cx="6192000" cy="324000"/>
+          </a:xfrm>
+          <a:prstGeom prst="rect">
+            <a:avLst/>
+          </a:prstGeom>
+          <a:noFill/>
+        </p:spPr>
+        <p:txBody>
+          <a:bodyPr wrap="square" lIns="72000" rIns="72000" tIns="36000" bIns="36000" anchor="ctr">
+            <a:spAutoFit/>
+          </a:bodyPr>
+          <a:lstStyle/>
+          <a:p>
+            <a:pPr>
+              <a:lnSpc>
+                <a:spcPct val="116000"/>
+              </a:lnSpc>
+              <a:spcBef>
+                <a:spcPts val="0"/>
+              </a:spcBef>
+              <a:spcAft>
+                <a:spcPts val="0"/>
+              </a:spcAft>
+            </a:pPr>
+            <a:r>
+              <a:rPr sz="850" b="0" i="0">
+                <a:solidFill>
+                  <a:srgbClr val="FFFFFF"/>
+                </a:solidFill>
+                <a:latin typeface="Yu Gothic"/>
+                <a:ea typeface="Yu Gothic"/>
+              </a:rPr>
+              <a:t>回復は、少しずつ育っていく</a:t>
+            </a:r>
+          </a:p>
+        </p:txBody>
+      </p:sp>
     </p:spTree>
   </p:cSld>
   <p:clrMapOvr>
@@ -8698,7 +9386,7 @@
 </p:sld>
 </file>
 
-<file path=ppt/slides/slide17.xml><?xml version="1.0" encoding="utf-8"?>
+<file path=ppt/slides/slide18.xml><?xml version="1.0" encoding="utf-8"?>
 <p:sld xmlns:a="http://schemas.openxmlformats.org/drawingml/2006/main" xmlns:p="http://schemas.openxmlformats.org/presentationml/2006/main" xmlns:r="http://schemas.openxmlformats.org/officeDocument/2006/relationships">
   <p:cSld>
     <p:spTree>
@@ -8894,8 +9582,8 @@
         </p:nvSpPr>
         <p:spPr>
           <a:xfrm>
-            <a:off x="576000" y="1008000"/>
-            <a:ext cx="6408000" cy="9108000"/>
+            <a:off x="576000" y="1080000"/>
+            <a:ext cx="3844800" cy="5400000"/>
           </a:xfrm>
           <a:prstGeom prst="rect">
             <a:avLst/>
@@ -8903,6 +9591,513 @@
           <a:noFill/>
         </p:spPr>
         <p:txBody>
+          <a:bodyPr wrap="square" lIns="72000" rIns="72000" tIns="36000" bIns="36000" anchor="t">
+            <a:spAutoFit/>
+          </a:bodyPr>
+          <a:lstStyle/>
+          <a:p>
+            <a:pPr>
+              <a:lnSpc>
+                <a:spcPct val="116000"/>
+              </a:lnSpc>
+              <a:spcBef>
+                <a:spcPts val="0"/>
+              </a:spcBef>
+              <a:spcAft>
+                <a:spcPts val="600"/>
+              </a:spcAft>
+            </a:pPr>
+            <a:r>
+              <a:rPr sz="1600" b="1" i="0">
+                <a:solidFill>
+                  <a:srgbClr val="1B3358"/>
+                </a:solidFill>
+                <a:latin typeface="Yu Gothic"/>
+                <a:ea typeface="Yu Gothic"/>
+              </a:rPr>
+              <a:t>24時間いつでも相談できます。</a:t>
+            </a:r>
+          </a:p>
+          <a:p>
+            <a:pPr>
+              <a:lnSpc>
+                <a:spcPct val="116000"/>
+              </a:lnSpc>
+              <a:spcBef>
+                <a:spcPts val="0"/>
+              </a:spcBef>
+              <a:spcAft>
+                <a:spcPts val="100"/>
+              </a:spcAft>
+            </a:pPr>
+            <a:r>
+              <a:rPr sz="1100" b="1" i="0">
+                <a:solidFill>
+                  <a:srgbClr val="1B3358"/>
+                </a:solidFill>
+                <a:latin typeface="Yu Gothic"/>
+                <a:ea typeface="Yu Gothic"/>
+              </a:rPr>
+              <a:t>24時間ホットライン（年中無休）</a:t>
+            </a:r>
+          </a:p>
+          <a:p>
+            <a:pPr>
+              <a:lnSpc>
+                <a:spcPct val="116000"/>
+              </a:lnSpc>
+              <a:spcBef>
+                <a:spcPts val="0"/>
+              </a:spcBef>
+              <a:spcAft>
+                <a:spcPts val="600"/>
+              </a:spcAft>
+            </a:pPr>
+            <a:r>
+              <a:rPr sz="2100" b="1" i="0">
+                <a:solidFill>
+                  <a:srgbClr val="C05C5C"/>
+                </a:solidFill>
+                <a:latin typeface="Yu Gothic"/>
+                <a:ea typeface="Yu Gothic"/>
+              </a:rPr>
+              <a:t>070-1409-4547（24時間）</a:t>
+            </a:r>
+          </a:p>
+          <a:p>
+            <a:pPr>
+              <a:lnSpc>
+                <a:spcPct val="116000"/>
+              </a:lnSpc>
+              <a:spcBef>
+                <a:spcPts val="0"/>
+              </a:spcBef>
+              <a:spcAft>
+                <a:spcPts val="100"/>
+              </a:spcAft>
+            </a:pPr>
+            <a:r>
+              <a:rPr sz="1250" b="1" i="0">
+                <a:solidFill>
+                  <a:srgbClr val="1B3358"/>
+                </a:solidFill>
+                <a:latin typeface="Yu Gothic"/>
+                <a:ea typeface="Yu Gothic"/>
+              </a:rPr>
+              <a:t>代表電話：042-707-0391</a:t>
+            </a:r>
+          </a:p>
+          <a:p>
+            <a:pPr>
+              <a:lnSpc>
+                <a:spcPct val="116000"/>
+              </a:lnSpc>
+              <a:spcBef>
+                <a:spcPts val="0"/>
+              </a:spcBef>
+              <a:spcAft>
+                <a:spcPts val="600"/>
+              </a:spcAft>
+            </a:pPr>
+            <a:r>
+              <a:rPr sz="1000" b="0" i="0">
+                <a:solidFill>
+                  <a:srgbClr val="5B6676"/>
+                </a:solidFill>
+                <a:latin typeface="Yu Gothic"/>
+                <a:ea typeface="Yu Gothic"/>
+              </a:rPr>
+              <a:t>（受付 9:00〜18:00）</a:t>
+            </a:r>
+          </a:p>
+          <a:p>
+            <a:pPr>
+              <a:lnSpc>
+                <a:spcPct val="116000"/>
+              </a:lnSpc>
+              <a:spcBef>
+                <a:spcPts val="0"/>
+              </a:spcBef>
+              <a:spcAft>
+                <a:spcPts val="600"/>
+              </a:spcAft>
+            </a:pPr>
+            <a:r>
+              <a:rPr sz="1100" b="0" i="0">
+                <a:solidFill>
+                  <a:srgbClr val="242C3A"/>
+                </a:solidFill>
+                <a:latin typeface="Yu Gothic"/>
+                <a:ea typeface="Yu Gothic"/>
+              </a:rPr>
+              <a:t>あなたとご家族の命と未来を守るために、私たちが全力でサポートします。</a:t>
+            </a:r>
+          </a:p>
+          <a:p>
+            <a:pPr>
+              <a:lnSpc>
+                <a:spcPct val="116000"/>
+              </a:lnSpc>
+              <a:spcBef>
+                <a:spcPts val="0"/>
+              </a:spcBef>
+              <a:spcAft>
+                <a:spcPts val="100"/>
+              </a:spcAft>
+            </a:pPr>
+            <a:r>
+              <a:rPr sz="1200" b="1" i="0">
+                <a:solidFill>
+                  <a:srgbClr val="2F9E6B"/>
+                </a:solidFill>
+                <a:latin typeface="Yu Gothic"/>
+                <a:ea typeface="Yu Gothic"/>
+              </a:rPr>
+              <a:t>ご利用できる方へ</a:t>
+            </a:r>
+          </a:p>
+          <a:p>
+            <a:pPr>
+              <a:lnSpc>
+                <a:spcPct val="116000"/>
+              </a:lnSpc>
+              <a:spcBef>
+                <a:spcPts val="0"/>
+              </a:spcBef>
+              <a:spcAft>
+                <a:spcPts val="100"/>
+              </a:spcAft>
+            </a:pPr>
+            <a:r>
+              <a:rPr sz="1050" b="0" i="0">
+                <a:solidFill>
+                  <a:srgbClr val="242C3A"/>
+                </a:solidFill>
+                <a:latin typeface="Yu Gothic"/>
+                <a:ea typeface="Yu Gothic"/>
+              </a:rPr>
+              <a:t>・秘密は厳守します</a:t>
+            </a:r>
+          </a:p>
+          <a:p>
+            <a:pPr>
+              <a:lnSpc>
+                <a:spcPct val="116000"/>
+              </a:lnSpc>
+              <a:spcBef>
+                <a:spcPts val="0"/>
+              </a:spcBef>
+              <a:spcAft>
+                <a:spcPts val="100"/>
+              </a:spcAft>
+            </a:pPr>
+            <a:r>
+              <a:rPr sz="1050" b="0" i="0">
+                <a:solidFill>
+                  <a:srgbClr val="242C3A"/>
+                </a:solidFill>
+                <a:latin typeface="Yu Gothic"/>
+                <a:ea typeface="Yu Gothic"/>
+              </a:rPr>
+              <a:t>・相談は無料です</a:t>
+            </a:r>
+          </a:p>
+          <a:p>
+            <a:pPr>
+              <a:lnSpc>
+                <a:spcPct val="116000"/>
+              </a:lnSpc>
+              <a:spcBef>
+                <a:spcPts val="0"/>
+              </a:spcBef>
+              <a:spcAft>
+                <a:spcPts val="100"/>
+              </a:spcAft>
+            </a:pPr>
+            <a:r>
+              <a:rPr sz="1050" b="0" i="0">
+                <a:solidFill>
+                  <a:srgbClr val="242C3A"/>
+                </a:solidFill>
+                <a:latin typeface="Yu Gothic"/>
+                <a:ea typeface="Yu Gothic"/>
+              </a:rPr>
+              <a:t>・ご家族だけの相談も大歓迎です</a:t>
+            </a:r>
+          </a:p>
+          <a:p>
+            <a:pPr>
+              <a:lnSpc>
+                <a:spcPct val="116000"/>
+              </a:lnSpc>
+              <a:spcBef>
+                <a:spcPts val="0"/>
+              </a:spcBef>
+              <a:spcAft>
+                <a:spcPts val="100"/>
+              </a:spcAft>
+            </a:pPr>
+            <a:r>
+              <a:rPr sz="1050" b="0" i="0">
+                <a:solidFill>
+                  <a:srgbClr val="242C3A"/>
+                </a:solidFill>
+                <a:latin typeface="Yu Gothic"/>
+                <a:ea typeface="Yu Gothic"/>
+              </a:rPr>
+              <a:t>・まずはお電話ください</a:t>
+            </a:r>
+          </a:p>
+        </p:txBody>
+      </p:sp>
+      <p:sp>
+        <p:nvSpPr>
+          <p:cNvPr id="7" name="Rectangle 6"/>
+          <p:cNvSpPr/>
+          <p:nvPr/>
+        </p:nvSpPr>
+        <p:spPr>
+          <a:xfrm>
+            <a:off x="5310000" y="1350000"/>
+            <a:ext cx="1692000" cy="1692000"/>
+          </a:xfrm>
+          <a:prstGeom prst="rect">
+            <a:avLst/>
+          </a:prstGeom>
+          <a:solidFill>
+            <a:srgbClr val="FFFFFF"/>
+          </a:solidFill>
+          <a:ln>
+            <a:noFill/>
+          </a:ln>
+          <a:effectLst/>
+        </p:spPr>
+        <p:style>
+          <a:lnRef idx="1">
+            <a:schemeClr val="accent1"/>
+          </a:lnRef>
+          <a:fillRef idx="3">
+            <a:schemeClr val="accent1"/>
+          </a:fillRef>
+          <a:effectRef idx="2">
+            <a:schemeClr val="accent1"/>
+          </a:effectRef>
+          <a:fontRef idx="minor">
+            <a:schemeClr val="lt1"/>
+          </a:fontRef>
+        </p:style>
+        <p:txBody>
+          <a:bodyPr rtlCol="0" anchor="ctr"/>
+          <a:lstStyle/>
+          <a:p>
+            <a:pPr algn="ctr"/>
+          </a:p>
+        </p:txBody>
+      </p:sp>
+      <p:pic>
+        <p:nvPicPr>
+          <p:cNvPr id="8" name="Picture 7" descr="qr-family.png"/>
+          <p:cNvPicPr>
+            <a:picLocks noChangeAspect="1"/>
+          </p:cNvPicPr>
+          <p:nvPr/>
+        </p:nvPicPr>
+        <p:blipFill>
+          <a:blip r:embed="rId2"/>
+          <a:stretch>
+            <a:fillRect/>
+          </a:stretch>
+        </p:blipFill>
+        <p:spPr>
+          <a:xfrm>
+            <a:off x="5400000" y="1440000"/>
+            <a:ext cx="1512000" cy="1512000"/>
+          </a:xfrm>
+          <a:prstGeom prst="rect">
+            <a:avLst/>
+          </a:prstGeom>
+        </p:spPr>
+      </p:pic>
+      <p:sp>
+        <p:nvSpPr>
+          <p:cNvPr id="9" name="TextBox 8"/>
+          <p:cNvSpPr txBox="1"/>
+          <p:nvPr/>
+        </p:nvSpPr>
+        <p:spPr>
+          <a:xfrm>
+            <a:off x="5184000" y="3006000"/>
+            <a:ext cx="1944000" cy="432000"/>
+          </a:xfrm>
+          <a:prstGeom prst="rect">
+            <a:avLst/>
+          </a:prstGeom>
+          <a:noFill/>
+        </p:spPr>
+        <p:txBody>
+          <a:bodyPr wrap="square" lIns="72000" rIns="72000" tIns="36000" bIns="36000" anchor="t">
+            <a:spAutoFit/>
+          </a:bodyPr>
+          <a:lstStyle/>
+          <a:p>
+            <a:pPr algn="ctr">
+              <a:lnSpc>
+                <a:spcPct val="116000"/>
+              </a:lnSpc>
+              <a:spcBef>
+                <a:spcPts val="0"/>
+              </a:spcBef>
+              <a:spcAft>
+                <a:spcPts val="0"/>
+              </a:spcAft>
+            </a:pPr>
+            <a:r>
+              <a:rPr sz="900" b="1" i="0">
+                <a:solidFill>
+                  <a:srgbClr val="1B3358"/>
+                </a:solidFill>
+                <a:latin typeface="Yu Gothic"/>
+                <a:ea typeface="Yu Gothic"/>
+              </a:rPr>
+              <a:t>公式ホームページ「ご家族の方へ」</a:t>
+            </a:r>
+          </a:p>
+        </p:txBody>
+      </p:sp>
+      <p:sp>
+        <p:nvSpPr>
+          <p:cNvPr id="10" name="TextBox 9"/>
+          <p:cNvSpPr txBox="1"/>
+          <p:nvPr/>
+        </p:nvSpPr>
+        <p:spPr>
+          <a:xfrm>
+            <a:off x="5112000" y="3420000"/>
+            <a:ext cx="2088000" cy="360000"/>
+          </a:xfrm>
+          <a:prstGeom prst="rect">
+            <a:avLst/>
+          </a:prstGeom>
+          <a:noFill/>
+        </p:spPr>
+        <p:txBody>
+          <a:bodyPr wrap="square" lIns="72000" rIns="72000" tIns="36000" bIns="36000" anchor="t">
+            <a:spAutoFit/>
+          </a:bodyPr>
+          <a:lstStyle/>
+          <a:p>
+            <a:pPr algn="ctr">
+              <a:lnSpc>
+                <a:spcPct val="116000"/>
+              </a:lnSpc>
+              <a:spcBef>
+                <a:spcPts val="0"/>
+              </a:spcBef>
+              <a:spcAft>
+                <a:spcPts val="0"/>
+              </a:spcAft>
+            </a:pPr>
+            <a:r>
+              <a:rPr sz="900" b="0" i="0">
+                <a:solidFill>
+                  <a:srgbClr val="5B6676"/>
+                </a:solidFill>
+                <a:latin typeface="Yu Gothic"/>
+                <a:ea typeface="Yu Gothic"/>
+              </a:rPr>
+              <a:t>スマホで読み取り</a:t>
+            </a:r>
+          </a:p>
+        </p:txBody>
+      </p:sp>
+      <p:pic>
+        <p:nvPicPr>
+          <p:cNvPr id="11" name="Picture 10" descr="image.jpg"/>
+          <p:cNvPicPr>
+            <a:picLocks noChangeAspect="1"/>
+          </p:cNvPicPr>
+          <p:nvPr/>
+        </p:nvPicPr>
+        <p:blipFill>
+          <a:blip r:embed="rId3"/>
+          <a:srcRect t="10962" b="10962"/>
+          <a:stretch>
+            <a:fillRect/>
+          </a:stretch>
+        </p:blipFill>
+        <p:spPr>
+          <a:xfrm>
+            <a:off x="576000" y="6372000"/>
+            <a:ext cx="6408000" cy="3744000"/>
+          </a:xfrm>
+          <a:prstGeom prst="rect">
+            <a:avLst/>
+          </a:prstGeom>
+        </p:spPr>
+      </p:pic>
+      <p:sp>
+        <p:nvSpPr>
+          <p:cNvPr id="12" name="Rectangle 11"/>
+          <p:cNvSpPr/>
+          <p:nvPr/>
+        </p:nvSpPr>
+        <p:spPr>
+          <a:xfrm>
+            <a:off x="576000" y="9792000"/>
+            <a:ext cx="6408000" cy="324000"/>
+          </a:xfrm>
+          <a:prstGeom prst="rect">
+            <a:avLst/>
+          </a:prstGeom>
+          <a:solidFill>
+            <a:srgbClr val="142744">
+              <a:alpha val="48000"/>
+            </a:srgbClr>
+          </a:solidFill>
+          <a:ln>
+            <a:noFill/>
+          </a:ln>
+          <a:effectLst/>
+        </p:spPr>
+        <p:style>
+          <a:lnRef idx="1">
+            <a:schemeClr val="accent1"/>
+          </a:lnRef>
+          <a:fillRef idx="3">
+            <a:schemeClr val="accent1"/>
+          </a:fillRef>
+          <a:effectRef idx="2">
+            <a:schemeClr val="accent1"/>
+          </a:effectRef>
+          <a:fontRef idx="minor">
+            <a:schemeClr val="lt1"/>
+          </a:fontRef>
+        </p:style>
+        <p:txBody>
+          <a:bodyPr rtlCol="0" anchor="ctr"/>
+          <a:lstStyle/>
+          <a:p>
+            <a:pPr algn="ctr"/>
+          </a:p>
+        </p:txBody>
+      </p:sp>
+      <p:sp>
+        <p:nvSpPr>
+          <p:cNvPr id="13" name="TextBox 12"/>
+          <p:cNvSpPr txBox="1"/>
+          <p:nvPr/>
+        </p:nvSpPr>
+        <p:spPr>
+          <a:xfrm>
+            <a:off x="684000" y="9792000"/>
+            <a:ext cx="6192000" cy="324000"/>
+          </a:xfrm>
+          <a:prstGeom prst="rect">
+            <a:avLst/>
+          </a:prstGeom>
+          <a:noFill/>
+        </p:spPr>
+        <p:txBody>
           <a:bodyPr wrap="square" lIns="72000" rIns="72000" tIns="36000" bIns="36000" anchor="ctr">
             <a:spAutoFit/>
           </a:bodyPr>
@@ -8916,179 +10111,64 @@
                 <a:spcPts val="0"/>
               </a:spcBef>
               <a:spcAft>
-                <a:spcPts val="600"/>
-              </a:spcAft>
-            </a:pPr>
-            <a:r>
-              <a:rPr sz="1700" b="1" i="0">
+                <a:spcPts val="0"/>
+              </a:spcAft>
+            </a:pPr>
+            <a:r>
+              <a:rPr sz="850" b="0" i="0">
+                <a:solidFill>
+                  <a:srgbClr val="FFFFFF"/>
+                </a:solidFill>
+                <a:latin typeface="Yu Gothic"/>
+                <a:ea typeface="Yu Gothic"/>
+              </a:rPr>
+              <a:t>相模原ダルク デイケアセンター（ダルクビル）</a:t>
+            </a:r>
+          </a:p>
+        </p:txBody>
+      </p:sp>
+      <p:sp>
+        <p:nvSpPr>
+          <p:cNvPr id="14" name="TextBox 13"/>
+          <p:cNvSpPr txBox="1"/>
+          <p:nvPr/>
+        </p:nvSpPr>
+        <p:spPr>
+          <a:xfrm>
+            <a:off x="576000" y="5976000"/>
+            <a:ext cx="6408000" cy="360000"/>
+          </a:xfrm>
+          <a:prstGeom prst="rect">
+            <a:avLst/>
+          </a:prstGeom>
+          <a:noFill/>
+        </p:spPr>
+        <p:txBody>
+          <a:bodyPr wrap="square" lIns="72000" rIns="72000" tIns="36000" bIns="36000" anchor="t">
+            <a:spAutoFit/>
+          </a:bodyPr>
+          <a:lstStyle/>
+          <a:p>
+            <a:pPr>
+              <a:lnSpc>
+                <a:spcPct val="116000"/>
+              </a:lnSpc>
+              <a:spcBef>
+                <a:spcPts val="0"/>
+              </a:spcBef>
+              <a:spcAft>
+                <a:spcPts val="0"/>
+              </a:spcAft>
+            </a:pPr>
+            <a:r>
+              <a:rPr sz="1200" b="1" i="0">
                 <a:solidFill>
                   <a:srgbClr val="1B3358"/>
                 </a:solidFill>
                 <a:latin typeface="Yu Gothic"/>
                 <a:ea typeface="Yu Gothic"/>
               </a:rPr>
-              <a:t>24時間いつでも相談できます。</a:t>
-            </a:r>
-          </a:p>
-          <a:p>
-            <a:pPr>
-              <a:lnSpc>
-                <a:spcPct val="116000"/>
-              </a:lnSpc>
-              <a:spcBef>
-                <a:spcPts val="0"/>
-              </a:spcBef>
-              <a:spcAft>
-                <a:spcPts val="100"/>
-              </a:spcAft>
-            </a:pPr>
-            <a:r>
-              <a:rPr sz="1200" b="1" i="0">
-                <a:solidFill>
-                  <a:srgbClr val="1B3358"/>
-                </a:solidFill>
-                <a:latin typeface="Yu Gothic"/>
-                <a:ea typeface="Yu Gothic"/>
-              </a:rPr>
-              <a:t>24時間ホットライン（年中無休）</a:t>
-            </a:r>
-          </a:p>
-          <a:p>
-            <a:pPr>
-              <a:lnSpc>
-                <a:spcPct val="116000"/>
-              </a:lnSpc>
-              <a:spcBef>
-                <a:spcPts val="0"/>
-              </a:spcBef>
-              <a:spcAft>
-                <a:spcPts val="600"/>
-              </a:spcAft>
-            </a:pPr>
-            <a:r>
-              <a:rPr sz="2200" b="1" i="0">
-                <a:solidFill>
-                  <a:srgbClr val="C05C5C"/>
-                </a:solidFill>
-                <a:latin typeface="Yu Gothic"/>
-                <a:ea typeface="Yu Gothic"/>
-              </a:rPr>
-              <a:t>070-1409-4547（24時間）</a:t>
-            </a:r>
-          </a:p>
-          <a:p>
-            <a:pPr>
-              <a:lnSpc>
-                <a:spcPct val="116000"/>
-              </a:lnSpc>
-              <a:spcBef>
-                <a:spcPts val="0"/>
-              </a:spcBef>
-              <a:spcAft>
-                <a:spcPts val="600"/>
-              </a:spcAft>
-            </a:pPr>
-            <a:r>
-              <a:rPr sz="1300" b="1" i="0">
-                <a:solidFill>
-                  <a:srgbClr val="1B3358"/>
-                </a:solidFill>
-                <a:latin typeface="Yu Gothic"/>
-                <a:ea typeface="Yu Gothic"/>
-              </a:rPr>
-              <a:t>代表電話：042-707-0391（9:00〜18:00）</a:t>
-            </a:r>
-          </a:p>
-          <a:p>
-            <a:pPr>
-              <a:lnSpc>
-                <a:spcPct val="116000"/>
-              </a:lnSpc>
-              <a:spcBef>
-                <a:spcPts val="0"/>
-              </a:spcBef>
-              <a:spcAft>
-                <a:spcPts val="600"/>
-              </a:spcAft>
-            </a:pPr>
-            <a:r>
-              <a:rPr sz="1200" b="0" i="0">
-                <a:solidFill>
-                  <a:srgbClr val="242C3A"/>
-                </a:solidFill>
-                <a:latin typeface="Yu Gothic"/>
-                <a:ea typeface="Yu Gothic"/>
-              </a:rPr>
-              <a:t>あなたとご家族の命と未来を守るために、私たちが全力でサポートします。</a:t>
-            </a:r>
-          </a:p>
-          <a:p>
-            <a:pPr>
-              <a:lnSpc>
-                <a:spcPct val="116000"/>
-              </a:lnSpc>
-              <a:spcBef>
-                <a:spcPts val="0"/>
-              </a:spcBef>
-              <a:spcAft>
-                <a:spcPts val="600"/>
-              </a:spcAft>
-            </a:pPr>
-            <a:r>
-              <a:rPr sz="1200" b="1" i="0">
-                <a:solidFill>
-                  <a:srgbClr val="2F9E6B"/>
-                </a:solidFill>
-                <a:latin typeface="Yu Gothic"/>
-                <a:ea typeface="Yu Gothic"/>
-              </a:rPr>
-              <a:t>ご利用できる方へ：秘密は厳守します／相談は無料です／ご家族だけの相談も大歓迎です／まずはお電話ください</a:t>
-            </a:r>
-          </a:p>
-          <a:p>
-            <a:pPr>
-              <a:lnSpc>
-                <a:spcPct val="116000"/>
-              </a:lnSpc>
-              <a:spcBef>
-                <a:spcPts val="0"/>
-              </a:spcBef>
-              <a:spcAft>
-                <a:spcPts val="300"/>
-              </a:spcAft>
-            </a:pPr>
-            <a:r>
-              <a:rPr sz="1150" b="0" i="0">
-                <a:solidFill>
-                  <a:srgbClr val="3A86C4"/>
-                </a:solidFill>
-                <a:latin typeface="Yu Gothic"/>
-                <a:ea typeface="Yu Gothic"/>
-              </a:rPr>
-              <a:t>公式ホームページ「ご家族の方へ」：https://new-s-darc.sakura.ne.jp/family/</a:t>
-            </a:r>
-          </a:p>
-          <a:p>
-            <a:pPr>
-              <a:lnSpc>
-                <a:spcPct val="116000"/>
-              </a:lnSpc>
-              <a:spcBef>
-                <a:spcPts val="0"/>
-              </a:spcBef>
-              <a:spcAft>
-                <a:spcPts val="400"/>
-              </a:spcAft>
-            </a:pPr>
-            <a:r>
-              <a:rPr sz="1300" b="1" i="0">
-                <a:solidFill>
-                  <a:srgbClr val="1B3358"/>
-                </a:solidFill>
-                <a:latin typeface="Yu Gothic"/>
-                <a:ea typeface="Yu Gothic"/>
-              </a:rPr>
-              <a:t>一般社団法人 相模原ダルク</a:t>
+              <a:t>一般社団法人 相模原ダルク（DARC）</a:t>
             </a:r>
           </a:p>
         </p:txBody>
@@ -9546,6 +10626,123 @@
           </a:p>
         </p:txBody>
       </p:sp>
+      <p:pic>
+        <p:nvPicPr>
+          <p:cNvPr id="8" name="Picture 7" descr="image.jpg"/>
+          <p:cNvPicPr>
+            <a:picLocks noChangeAspect="1"/>
+          </p:cNvPicPr>
+          <p:nvPr/>
+        </p:nvPicPr>
+        <p:blipFill>
+          <a:blip r:embed="rId3"/>
+          <a:srcRect l="5447" r="5447"/>
+          <a:stretch>
+            <a:fillRect/>
+          </a:stretch>
+        </p:blipFill>
+        <p:spPr>
+          <a:xfrm>
+            <a:off x="576000" y="5323419"/>
+            <a:ext cx="6408000" cy="4792580"/>
+          </a:xfrm>
+          <a:prstGeom prst="rect">
+            <a:avLst/>
+          </a:prstGeom>
+        </p:spPr>
+      </p:pic>
+      <p:sp>
+        <p:nvSpPr>
+          <p:cNvPr id="9" name="Rectangle 8"/>
+          <p:cNvSpPr/>
+          <p:nvPr/>
+        </p:nvSpPr>
+        <p:spPr>
+          <a:xfrm>
+            <a:off x="576000" y="9792000"/>
+            <a:ext cx="6408000" cy="324000"/>
+          </a:xfrm>
+          <a:prstGeom prst="rect">
+            <a:avLst/>
+          </a:prstGeom>
+          <a:solidFill>
+            <a:srgbClr val="142744">
+              <a:alpha val="48000"/>
+            </a:srgbClr>
+          </a:solidFill>
+          <a:ln>
+            <a:noFill/>
+          </a:ln>
+          <a:effectLst/>
+        </p:spPr>
+        <p:style>
+          <a:lnRef idx="1">
+            <a:schemeClr val="accent1"/>
+          </a:lnRef>
+          <a:fillRef idx="3">
+            <a:schemeClr val="accent1"/>
+          </a:fillRef>
+          <a:effectRef idx="2">
+            <a:schemeClr val="accent1"/>
+          </a:effectRef>
+          <a:fontRef idx="minor">
+            <a:schemeClr val="lt1"/>
+          </a:fontRef>
+        </p:style>
+        <p:txBody>
+          <a:bodyPr rtlCol="0" anchor="ctr"/>
+          <a:lstStyle/>
+          <a:p>
+            <a:pPr algn="ctr"/>
+          </a:p>
+        </p:txBody>
+      </p:sp>
+      <p:sp>
+        <p:nvSpPr>
+          <p:cNvPr id="10" name="TextBox 9"/>
+          <p:cNvSpPr txBox="1"/>
+          <p:nvPr/>
+        </p:nvSpPr>
+        <p:spPr>
+          <a:xfrm>
+            <a:off x="684000" y="9792000"/>
+            <a:ext cx="6192000" cy="324000"/>
+          </a:xfrm>
+          <a:prstGeom prst="rect">
+            <a:avLst/>
+          </a:prstGeom>
+          <a:noFill/>
+        </p:spPr>
+        <p:txBody>
+          <a:bodyPr wrap="square" lIns="72000" rIns="72000" tIns="36000" bIns="36000" anchor="ctr">
+            <a:spAutoFit/>
+          </a:bodyPr>
+          <a:lstStyle/>
+          <a:p>
+            <a:pPr>
+              <a:lnSpc>
+                <a:spcPct val="116000"/>
+              </a:lnSpc>
+              <a:spcBef>
+                <a:spcPts val="0"/>
+              </a:spcBef>
+              <a:spcAft>
+                <a:spcPts val="0"/>
+              </a:spcAft>
+            </a:pPr>
+            <a:r>
+              <a:rPr sz="850" b="0" i="0">
+                <a:solidFill>
+                  <a:srgbClr val="FFFFFF"/>
+                </a:solidFill>
+                <a:latin typeface="Yu Gothic"/>
+                <a:ea typeface="Yu Gothic"/>
+              </a:rPr>
+              <a:t>ひとりで抱えず、支え合いながら</a:t>
+            </a:r>
+          </a:p>
+        </p:txBody>
+      </p:sp>
     </p:spTree>
   </p:cSld>
   <p:clrMapOvr>
@@ -9853,6 +11050,123 @@
                 <a:ea typeface="Yu Gothic"/>
               </a:rPr>
               <a:t>読み進める中で「これまでの対応は間違っていたのか」と感じる場面があるかもしれません。けれど、どうか自分を責めないでください。それは、大切な人を守ろうとしたあなたの精一杯だったのですから。ここに書かれているのは現場の経験と回復支援の知見から生まれた「原則」です。判断に迷うときは、一人で抱え込まず、相模原ダルクへご相談ください。</a:t>
+            </a:r>
+          </a:p>
+        </p:txBody>
+      </p:sp>
+      <p:pic>
+        <p:nvPicPr>
+          <p:cNvPr id="7" name="Picture 6" descr="image.jpg"/>
+          <p:cNvPicPr>
+            <a:picLocks noChangeAspect="1"/>
+          </p:cNvPicPr>
+          <p:nvPr/>
+        </p:nvPicPr>
+        <p:blipFill>
+          <a:blip r:embed="rId2"/>
+          <a:srcRect l="13467" r="13467"/>
+          <a:stretch>
+            <a:fillRect/>
+          </a:stretch>
+        </p:blipFill>
+        <p:spPr>
+          <a:xfrm>
+            <a:off x="576000" y="4271344"/>
+            <a:ext cx="6408000" cy="5844655"/>
+          </a:xfrm>
+          <a:prstGeom prst="rect">
+            <a:avLst/>
+          </a:prstGeom>
+        </p:spPr>
+      </p:pic>
+      <p:sp>
+        <p:nvSpPr>
+          <p:cNvPr id="8" name="Rectangle 7"/>
+          <p:cNvSpPr/>
+          <p:nvPr/>
+        </p:nvSpPr>
+        <p:spPr>
+          <a:xfrm>
+            <a:off x="576000" y="9792000"/>
+            <a:ext cx="6408000" cy="324000"/>
+          </a:xfrm>
+          <a:prstGeom prst="rect">
+            <a:avLst/>
+          </a:prstGeom>
+          <a:solidFill>
+            <a:srgbClr val="142744">
+              <a:alpha val="48000"/>
+            </a:srgbClr>
+          </a:solidFill>
+          <a:ln>
+            <a:noFill/>
+          </a:ln>
+          <a:effectLst/>
+        </p:spPr>
+        <p:style>
+          <a:lnRef idx="1">
+            <a:schemeClr val="accent1"/>
+          </a:lnRef>
+          <a:fillRef idx="3">
+            <a:schemeClr val="accent1"/>
+          </a:fillRef>
+          <a:effectRef idx="2">
+            <a:schemeClr val="accent1"/>
+          </a:effectRef>
+          <a:fontRef idx="minor">
+            <a:schemeClr val="lt1"/>
+          </a:fontRef>
+        </p:style>
+        <p:txBody>
+          <a:bodyPr rtlCol="0" anchor="ctr"/>
+          <a:lstStyle/>
+          <a:p>
+            <a:pPr algn="ctr"/>
+          </a:p>
+        </p:txBody>
+      </p:sp>
+      <p:sp>
+        <p:nvSpPr>
+          <p:cNvPr id="9" name="TextBox 8"/>
+          <p:cNvSpPr txBox="1"/>
+          <p:nvPr/>
+        </p:nvSpPr>
+        <p:spPr>
+          <a:xfrm>
+            <a:off x="684000" y="9792000"/>
+            <a:ext cx="6192000" cy="324000"/>
+          </a:xfrm>
+          <a:prstGeom prst="rect">
+            <a:avLst/>
+          </a:prstGeom>
+          <a:noFill/>
+        </p:spPr>
+        <p:txBody>
+          <a:bodyPr wrap="square" lIns="72000" rIns="72000" tIns="36000" bIns="36000" anchor="ctr">
+            <a:spAutoFit/>
+          </a:bodyPr>
+          <a:lstStyle/>
+          <a:p>
+            <a:pPr>
+              <a:lnSpc>
+                <a:spcPct val="116000"/>
+              </a:lnSpc>
+              <a:spcBef>
+                <a:spcPts val="0"/>
+              </a:spcBef>
+              <a:spcAft>
+                <a:spcPts val="0"/>
+              </a:spcAft>
+            </a:pPr>
+            <a:r>
+              <a:rPr sz="850" b="0" i="0">
+                <a:solidFill>
+                  <a:srgbClr val="FFFFFF"/>
+                </a:solidFill>
+                <a:latin typeface="Yu Gothic"/>
+                <a:ea typeface="Yu Gothic"/>
+              </a:rPr>
+              <a:t>同じ思いのご家族が集う、家族会のイメージ</a:t>
             </a:r>
           </a:p>
         </p:txBody>

--- a/public/manual-1page.pptx
+++ b/public/manual-1page.pptx
@@ -10483,7 +10483,7 @@
                 <a:latin typeface="Yu Gothic"/>
                 <a:ea typeface="Yu Gothic"/>
               </a:rPr>
-              <a:t>夜の十一時を過ぎた頃、玄関のチャイムが鳴りました。こんな時間に誰だろう。胸の奥がざわつきました。ドアを開けると、しばらく施設で暮らしていたはずの息子が立っていました。少し痩せて、うつむいて、けれど確かに、我が子の顔でした。</a:t>
+              <a:t>夜の十一時を過ぎた頃でした。もう休もうとしていたその時、玄関のチャイムが鳴りました。こんな時間に誰だろう。胸の奥がざわつきました。心のどこかで、来る人の見当はついていたのかもしれません。</a:t>
             </a:r>
           </a:p>
           <a:p>
@@ -10499,6 +10499,29 @@
               </a:spcAft>
             </a:pPr>
             <a:r>
+              <a:rPr sz="1050" b="0" i="0">
+                <a:solidFill>
+                  <a:srgbClr val="242C3A"/>
+                </a:solidFill>
+                <a:latin typeface="Yu Gothic"/>
+                <a:ea typeface="Yu Gothic"/>
+              </a:rPr>
+              <a:t>ドアを開けると、しばらく施設で暮らしていたはずの息子が立っていました。少し痩せて、うつむいて、けれど確かに、我が子の顔でした。</a:t>
+            </a:r>
+          </a:p>
+          <a:p>
+            <a:pPr>
+              <a:lnSpc>
+                <a:spcPct val="116000"/>
+              </a:lnSpc>
+              <a:spcBef>
+                <a:spcPts val="0"/>
+              </a:spcBef>
+              <a:spcAft>
+                <a:spcPts val="500"/>
+              </a:spcAft>
+            </a:pPr>
+            <a:r>
               <a:rPr sz="1050" b="1" i="0">
                 <a:solidFill>
                   <a:srgbClr val="1B3358"/>
@@ -10529,7 +10552,7 @@
                 <a:latin typeface="Yu Gothic"/>
                 <a:ea typeface="Yu Gothic"/>
               </a:rPr>
-              <a:t>声は震えていました。ダルクを自分から出てきてしまったこと、約束を守れなかったこと。頭では分かっていても、目の前にいるのは、大切な我が子でした。</a:t>
+              <a:t>声は震えていました。玄関の灯りの下で見るその姿に、胸が締めつけられました。ダルクを自分から出てきてしまったこと、約束を守れなかったこと。頭では分かっていました。それでも、目の前にいるのは、大切な我が子でした。</a:t>
             </a:r>
           </a:p>
           <a:p>
@@ -10552,7 +10575,7 @@
                 <a:latin typeface="Yu Gothic"/>
                 <a:ea typeface="Yu Gothic"/>
               </a:rPr>
-              <a:t>「お腹すいた」と言われれば、温かいご飯を出してあげたくなります。疲れた顔を見れば、今夜くらいは布団で眠らせてあげたくなります。それは、親として当たり前の、愛情そのものです。</a:t>
+              <a:t>「お腹すいた」と言われれば、温かいご飯を出してあげたくなります。汚れた服を見れば、お風呂に入れてあげたくなります。疲れた顔を見れば、今夜くらいは布団で眠らせてあげたくなります。それは、親として当たり前の気持ちです。愛情そのものです。</a:t>
             </a:r>
           </a:p>
           <a:p>
@@ -10575,7 +10598,30 @@
                 <a:latin typeface="Yu Gothic"/>
                 <a:ea typeface="Yu Gothic"/>
               </a:rPr>
-              <a:t>けれど、心の隅で別の声も聞こえていました。「ここで家に入れて、本当にこの子のためになるのだろうか」。以前も、こうして戻ってきては、また同じことを繰り返してきた——。入れてあげたい気持ちと、入れてはいけないという思いのあいだで、あなたは玄関先に立ち尽くしました。</a:t>
+              <a:t>けれど、心の隅で、別の声も聞こえていました。「ここで家に入れてしまって、本当にこの子のためになるのだろうか」。以前も、こうして戻ってきては、また同じことを繰り返してきたことを、あなたは知っているからです。</a:t>
+            </a:r>
+          </a:p>
+          <a:p>
+            <a:pPr>
+              <a:lnSpc>
+                <a:spcPct val="116000"/>
+              </a:lnSpc>
+              <a:spcBef>
+                <a:spcPts val="0"/>
+              </a:spcBef>
+              <a:spcAft>
+                <a:spcPts val="500"/>
+              </a:spcAft>
+            </a:pPr>
+            <a:r>
+              <a:rPr sz="1050" b="0" i="0">
+                <a:solidFill>
+                  <a:srgbClr val="242C3A"/>
+                </a:solidFill>
+                <a:latin typeface="Yu Gothic"/>
+                <a:ea typeface="Yu Gothic"/>
+              </a:rPr>
+              <a:t>入れてあげたい気持ちと、入れてはいけないという思い。そのあいだで、あなたは玄関先に立ち尽くしました。どちらを選んでも、胸が痛む。これほど苦しい選択が、この世にあるでしょうか。</a:t>
             </a:r>
           </a:p>
           <a:p>
@@ -10636,15 +10682,15 @@
         </p:nvPicPr>
         <p:blipFill>
           <a:blip r:embed="rId3"/>
-          <a:srcRect l="5447" r="5447"/>
+          <a:srcRect t="5695" b="5695"/>
           <a:stretch>
             <a:fillRect/>
           </a:stretch>
         </p:blipFill>
         <p:spPr>
           <a:xfrm>
-            <a:off x="576000" y="5323419"/>
-            <a:ext cx="6408000" cy="4792580"/>
+            <a:off x="576000" y="6331964"/>
+            <a:ext cx="6408000" cy="3784035"/>
           </a:xfrm>
           <a:prstGeom prst="rect">
             <a:avLst/>
